--- a/INFOSYS704 A3/pitch/Kmart-Delivery-Assist-Lab12.pptx
+++ b/INFOSYS704 A3/pitch/Kmart-Delivery-Assist-Lab12.pptx
@@ -15,6 +15,9 @@
     <p:sldId id="263" r:id="rId15"/>
     <p:sldId id="264" r:id="rId16"/>
     <p:sldId id="265" r:id="rId17"/>
+    <p:sldId id="266" r:id="rId18"/>
+    <p:sldId id="267" r:id="rId19"/>
+    <p:sldId id="268" r:id="rId20"/>
   </p:sldIdLst>
   <p:sldSz cx="12191695" cy="6858000" type="screen4x3"/>
   <p:notesSz cx="6858000" cy="9144000"/>
@@ -511,7 +514,7 @@
           <a:lstStyle/>
           <a:p>
             <a:r>
-              <a:t>0:00. Good morning. We are here to show the customer face of delivery recovery. The app is open. I will spend most of the five minutes inside it. Title only. Do not read the subtitle.</a:t>
+              <a:t>BARRY · 0:00 to 0:15. Good morning. We are here to show the customer face of delivery recovery. The app is open. I will spend most of the five minutes inside it. Title only. Do not read the subtitle.</a:t>
             </a:r>
           </a:p>
         </p:txBody>
@@ -581,7 +584,217 @@
           <a:lstStyle/>
           <a:p>
             <a:r>
-              <a:t>Do not spend speaking time here unless asked. This slide has to be last in the file. Fill the three UPIs before Canvas upload. Confirm 34/33/33 with Taariq and Huy. If the split changes, change the percentages so they still total 100.</a:t>
+              <a:t>TAARIQ · 4:05 to 4:30. Twenty-five seconds, no demo unless asked. Say: Delivery Assist is the customer face. Supply Hub, in the same app, is the buyer side. It catches the same kinds of delivery problems earlier, on the supplier purchase order, using the same SAP API. Mix-Lock reduces the markdown risk before stock is even shipped. Hand back to Barry for the ask.</a:t>
+            </a:r>
+          </a:p>
+        </p:txBody>
+      </p:sp>
+      <p:sp>
+        <p:nvSpPr>
+          <p:cNvPr id="4" name="Slide Number Placeholder 3"/>
+          <p:cNvSpPr>
+            <a:spLocks noGrp="1"/>
+          </p:cNvSpPr>
+          <p:nvPr>
+            <p:ph type="sldNum" idx="5" sz="quarter"/>
+          </p:nvPr>
+        </p:nvSpPr>
+        <p:spPr/>
+      </p:sp>
+    </p:spTree>
+  </p:cSld>
+  <p:clrMapOvr>
+    <a:masterClrMapping/>
+  </p:clrMapOvr>
+</p:notes>
+</file>
+
+<file path=ppt/notesSlides/notesSlide11.xml><?xml version="1.0" encoding="utf-8"?>
+<p:notes xmlns:a="http://schemas.openxmlformats.org/drawingml/2006/main" xmlns:p="http://schemas.openxmlformats.org/presentationml/2006/main" xmlns:r="http://schemas.openxmlformats.org/officeDocument/2006/relationships">
+  <p:cSld>
+    <p:spTree>
+      <p:nvGrpSpPr>
+        <p:cNvPr id="1" name=""/>
+        <p:cNvGrpSpPr/>
+        <p:nvPr/>
+      </p:nvGrpSpPr>
+      <p:grpSpPr>
+        <a:xfrm>
+          <a:off x="0" y="0"/>
+          <a:ext cx="0" cy="0"/>
+          <a:chOff x="0" y="0"/>
+          <a:chExt cx="0" cy="0"/>
+        </a:xfrm>
+      </p:grpSpPr>
+      <p:sp>
+        <p:nvSpPr>
+          <p:cNvPr id="2" name="Slide Image Placeholder 1"/>
+          <p:cNvSpPr>
+            <a:spLocks noGrp="1"/>
+          </p:cNvSpPr>
+          <p:nvPr>
+            <p:ph type="sldImg" idx="2"/>
+          </p:nvPr>
+        </p:nvSpPr>
+        <p:spPr/>
+      </p:sp>
+      <p:sp>
+        <p:nvSpPr>
+          <p:cNvPr id="3" name="Notes Placeholder 2"/>
+          <p:cNvSpPr>
+            <a:spLocks noGrp="1"/>
+          </p:cNvSpPr>
+          <p:nvPr>
+            <p:ph type="body" idx="3" sz="quarter"/>
+          </p:nvPr>
+        </p:nvSpPr>
+        <p:spPr/>
+        <p:txBody>
+          <a:bodyPr/>
+          <a:lstStyle/>
+          <a:p>
+            <a:r>
+              <a:t>BARRY · 4:30 to 4:50. Close on the ask, not a summary of every slide. Today the customer can finish the recovery. The heavier routing work stays later. A refund is a decision, not a side effect. Thank them and take one question. Then the disclaimer slide is for the upload, not for a speech.</a:t>
+            </a:r>
+          </a:p>
+        </p:txBody>
+      </p:sp>
+      <p:sp>
+        <p:nvSpPr>
+          <p:cNvPr id="4" name="Slide Number Placeholder 3"/>
+          <p:cNvSpPr>
+            <a:spLocks noGrp="1"/>
+          </p:cNvSpPr>
+          <p:nvPr>
+            <p:ph type="sldNum" idx="5" sz="quarter"/>
+          </p:nvPr>
+        </p:nvSpPr>
+        <p:spPr/>
+      </p:sp>
+    </p:spTree>
+  </p:cSld>
+  <p:clrMapOvr>
+    <a:masterClrMapping/>
+  </p:clrMapOvr>
+</p:notes>
+</file>
+
+<file path=ppt/notesSlides/notesSlide12.xml><?xml version="1.0" encoding="utf-8"?>
+<p:notes xmlns:a="http://schemas.openxmlformats.org/drawingml/2006/main" xmlns:p="http://schemas.openxmlformats.org/presentationml/2006/main" xmlns:r="http://schemas.openxmlformats.org/officeDocument/2006/relationships">
+  <p:cSld>
+    <p:spTree>
+      <p:nvGrpSpPr>
+        <p:cNvPr id="1" name=""/>
+        <p:cNvGrpSpPr/>
+        <p:nvPr/>
+      </p:nvGrpSpPr>
+      <p:grpSpPr>
+        <a:xfrm>
+          <a:off x="0" y="0"/>
+          <a:ext cx="0" cy="0"/>
+          <a:chOff x="0" y="0"/>
+          <a:chExt cx="0" cy="0"/>
+        </a:xfrm>
+      </p:grpSpPr>
+      <p:sp>
+        <p:nvSpPr>
+          <p:cNvPr id="2" name="Slide Image Placeholder 1"/>
+          <p:cNvSpPr>
+            <a:spLocks noGrp="1"/>
+          </p:cNvSpPr>
+          <p:nvPr>
+            <p:ph type="sldImg" idx="2"/>
+          </p:nvPr>
+        </p:nvSpPr>
+        <p:spPr/>
+      </p:sp>
+      <p:sp>
+        <p:nvSpPr>
+          <p:cNvPr id="3" name="Notes Placeholder 2"/>
+          <p:cNvSpPr>
+            <a:spLocks noGrp="1"/>
+          </p:cNvSpPr>
+          <p:nvPr>
+            <p:ph type="body" idx="3" sz="quarter"/>
+          </p:nvPr>
+        </p:nvSpPr>
+        <p:spPr/>
+        <p:txBody>
+          <a:bodyPr/>
+          <a:lstStyle/>
+          <a:p>
+            <a:r>
+              <a:t>Backup only. Use it if the app will not load in the lab. Talk through the five screens in under a minute, then go to the ask.</a:t>
+            </a:r>
+          </a:p>
+        </p:txBody>
+      </p:sp>
+      <p:sp>
+        <p:nvSpPr>
+          <p:cNvPr id="4" name="Slide Number Placeholder 3"/>
+          <p:cNvSpPr>
+            <a:spLocks noGrp="1"/>
+          </p:cNvSpPr>
+          <p:nvPr>
+            <p:ph type="sldNum" idx="5" sz="quarter"/>
+          </p:nvPr>
+        </p:nvSpPr>
+        <p:spPr/>
+      </p:sp>
+    </p:spTree>
+  </p:cSld>
+  <p:clrMapOvr>
+    <a:masterClrMapping/>
+  </p:clrMapOvr>
+</p:notes>
+</file>
+
+<file path=ppt/notesSlides/notesSlide13.xml><?xml version="1.0" encoding="utf-8"?>
+<p:notes xmlns:a="http://schemas.openxmlformats.org/drawingml/2006/main" xmlns:p="http://schemas.openxmlformats.org/presentationml/2006/main" xmlns:r="http://schemas.openxmlformats.org/officeDocument/2006/relationships">
+  <p:cSld>
+    <p:spTree>
+      <p:nvGrpSpPr>
+        <p:cNvPr id="1" name=""/>
+        <p:cNvGrpSpPr/>
+        <p:nvPr/>
+      </p:nvGrpSpPr>
+      <p:grpSpPr>
+        <a:xfrm>
+          <a:off x="0" y="0"/>
+          <a:ext cx="0" cy="0"/>
+          <a:chOff x="0" y="0"/>
+          <a:chExt cx="0" cy="0"/>
+        </a:xfrm>
+      </p:grpSpPr>
+      <p:sp>
+        <p:nvSpPr>
+          <p:cNvPr id="2" name="Slide Image Placeholder 1"/>
+          <p:cNvSpPr>
+            <a:spLocks noGrp="1"/>
+          </p:cNvSpPr>
+          <p:nvPr>
+            <p:ph type="sldImg" idx="2"/>
+          </p:nvPr>
+        </p:nvSpPr>
+        <p:spPr/>
+      </p:sp>
+      <p:sp>
+        <p:nvSpPr>
+          <p:cNvPr id="3" name="Notes Placeholder 2"/>
+          <p:cNvSpPr>
+            <a:spLocks noGrp="1"/>
+          </p:cNvSpPr>
+          <p:nvPr>
+            <p:ph type="body" idx="3" sz="quarter"/>
+          </p:nvPr>
+        </p:nvSpPr>
+        <p:spPr/>
+        <p:txBody>
+          <a:bodyPr/>
+          <a:lstStyle/>
+          <a:p>
+            <a:r>
+              <a:t>Do not spend speaking time here unless asked. This slide has to be last in the file. Fill the three UPIs before Canvas upload. Confirm the 34/33/33 split with the whole group. If the split changes, change the percentages so they still total 100.</a:t>
             </a:r>
           </a:p>
         </p:txBody>
@@ -651,7 +864,7 @@
           <a:lstStyle/>
           <a:p>
             <a:r>
-              <a:t>0:20 to 0:50. Situation only. Kmart has already invested in fulfilment. The sales order, the outbound delivery and the freight order exist. What the customer meets is still a carrier page and a call. Stop. Do not mention the matrix yet.</a:t>
+              <a:t>BARRY · 0:15 to 0:40. Situation only. Kmart has already invested in fulfilment. The sales order, the outbound delivery and the freight order exist. What the customer meets is still a carrier page and a call. Stop. Do not mention the matrix yet.</a:t>
             </a:r>
           </a:p>
         </p:txBody>
@@ -721,7 +934,7 @@
           <a:lstStyle/>
           <a:p>
             <a:r>
-              <a:t>0:50 to 1:20. Complication. Say the three lines slowly. End on this sentence: the customer cannot finish the recovery, so the order stays an exception. Then go to the resolution.</a:t>
+              <a:t>BARRY · 0:40 to 1:05. Complication. Say the three lines slowly. End on this sentence: the customer cannot finish the recovery, so the order stays an exception. Then go to the resolution.</a:t>
             </a:r>
           </a:p>
         </p:txBody>
@@ -791,7 +1004,7 @@
           <a:lstStyle/>
           <a:p>
             <a:r>
-              <a:t>1:20 to 1:50. Read the six steps only as a path, not as a list to memorise. Point at the screen if the app is already projected. Tell them the demo order is KM185002, the damaged storage box. The cushion in the same order is fine, so a refund is eighteen dollars, not thirty.</a:t>
+              <a:t>BARRY · 1:05 to 1:30. Hand over to Huy at the end. Read the six steps only as a path, not as a list to memorise. Point at the screen if the app is already projected. Tell them the demo order is KM185002, the damaged storage box. The cushion in the same order is fine, so a refund is eighteen dollars, not thirty.</a:t>
             </a:r>
           </a:p>
         </p:txBody>
@@ -861,7 +1074,7 @@
           <a:lstStyle/>
           <a:p>
             <a:r>
-              <a:t>1:50 to 2:20. Start from the A2 effort-impact result, do not invent a new winner. P2 scored 4.50 and stays the programme. P1 scored 4.10 and waits for shadow evidence. Say why the prototype is Delivery Assist: the API pool has no routing service and no cost dictionary, so the internal foundation cannot be built here. The pool can read the order journey and open a service request. That is the exception the customer feels. A status page with no choice does not recover it.</a:t>
+              <a:t>HUY · 1:30 to 1:55. Start from the A2 effort-impact result, do not invent a new winner. P2 scored 4.50 and stays the programme. P1 scored 4.10 and waits for shadow evidence. Say why the prototype is Delivery Assist: the API pool has no routing service and no cost dictionary, so the internal foundation cannot be built here. The pool can read the order journey and open a service request. That is the exception the customer feels. A status page with no choice does not recover it.</a:t>
             </a:r>
           </a:p>
         </p:txBody>
@@ -931,7 +1144,7 @@
           <a:lstStyle/>
           <a:p>
             <a:r>
-              <a:t>2:20 to 2:45. This is option 3, not a small wrapper change. Name the five stages once: empathise, define, ideate, prototype, test. Then the models. AS-IS file is design/A3_AS-IS_Customer_Exception.bpmn. TO-BE file is design/A3_TO-BE_Delivery_Assist.bpmn. Say the billing API can read, reject or delete, and cannot create a refund. Do not claim a live refund posting. The write we do have is the service request.</a:t>
+              <a:t>HUY · 1:55 to 2:20. This is option 3, not a small wrapper change. Name the five stages once: empathise, define, ideate, prototype, test. Then the models. AS-IS file is design/A3_AS-IS_Customer_Exception.bpmn. TO-BE file is design/A3_TO-BE_Delivery_Assist.bpmn. Say the billing API can read, reject or delete, and cannot create a refund. Do not claim a live refund posting. The write we do have is the service request.</a:t>
             </a:r>
           </a:p>
         </p:txBody>
@@ -1001,7 +1214,7 @@
           <a:lstStyle/>
           <a:p>
             <a:r>
-              <a:t>2:45 to 3:05. Do not read all ten. Say: status stays visible, the words are the customer’s, a refund asks twice, and a healthy order is not forced into a problem. The other six are on the slide if asked. Then go to the app.</a:t>
+              <a:t>HUY · 2:20 to 2:35. Do not read all ten. Say: status stays visible, the words are the customer’s, a refund asks twice, and a healthy order is not forced into a problem. The other six are on the slide if asked. Hand over to Taariq.</a:t>
             </a:r>
           </a:p>
         </p:txBody>
@@ -1071,7 +1284,7 @@
           <a:lstStyle/>
           <a:p>
             <a:r>
-              <a:t>2:40 to 4:20. Leave this slide only if the app is not yet on screen. Preferred: the app is already full screen and you do not linger here. Clicks: Storage box. See the problem. This is the problem. Continue, replacement is already selected. Check for an update. Check again. Review the outcome. Confirm replacement. Open the SAP service request and point at the sales order 450218 and the service request API. If time remains, say the lamp order offers redelivery, store collection or a full refund. Do not hunt for menus.</a:t>
+              <a:t>TAARIQ · 2:35 to 2:55. Twenty seconds. Say: the order data is read live from the SAP sandbox with our API key. The sandbox does not allow writes, so every write is built in the exact SAP format and shown in the app, ready for production. We deployed the API proxy and MCP server in Integration Suite and built the app with OpenCode prompts. Then go to the app.</a:t>
             </a:r>
           </a:p>
         </p:txBody>
@@ -1141,7 +1354,7 @@
           <a:lstStyle/>
           <a:p>
             <a:r>
-              <a:t>4:20 to 4:45. Close on the ask, not a summary of every slide. Today the customer can finish the recovery. The heavier routing work stays later. A refund is a decision, not a side effect. Thank them and take one question. Then the disclaimer slide is for the upload, not for a speech.</a:t>
+              <a:t>TAARIQ · 2:55 to 4:05. Leave this slide only if the app is not yet on screen. Preferred: the app is already full screen and you do not linger here. Clicks: Storage box. See the problem. This is the problem. Continue, replacement is already selected. Check for an update. Check again. Review the outcome. Confirm replacement. Open the SAP service request and point at the sales order 450218 and the service request API. If the demo fails, skip to the backup slide (12) and talk through the screenshots. Do not hunt for menus.</a:t>
             </a:r>
           </a:p>
         </p:txBody>
@@ -4384,6 +4597,1776 @@
 </file>
 
 <file path=ppt/slides/slide10.xml><?xml version="1.0" encoding="utf-8"?>
+<p:sld xmlns:a="http://schemas.openxmlformats.org/drawingml/2006/main" xmlns:p="http://schemas.openxmlformats.org/presentationml/2006/main" xmlns:r="http://schemas.openxmlformats.org/officeDocument/2006/relationships">
+  <p:cSld>
+    <p:spTree>
+      <p:nvGrpSpPr>
+        <p:cNvPr id="1" name=""/>
+        <p:cNvGrpSpPr/>
+        <p:nvPr/>
+      </p:nvGrpSpPr>
+      <p:grpSpPr/>
+      <p:sp>
+        <p:nvSpPr>
+          <p:cNvPr id="2" name="Rectangle 1"/>
+          <p:cNvSpPr/>
+          <p:nvPr/>
+        </p:nvSpPr>
+        <p:spPr>
+          <a:xfrm>
+            <a:off x="0" y="0"/>
+            <a:ext cx="12191695" cy="6858000"/>
+          </a:xfrm>
+          <a:prstGeom prst="rect">
+            <a:avLst/>
+          </a:prstGeom>
+          <a:solidFill>
+            <a:srgbClr val="FFFFFF"/>
+          </a:solidFill>
+          <a:ln>
+            <a:noFill/>
+          </a:ln>
+        </p:spPr>
+        <p:style>
+          <a:lnRef idx="1">
+            <a:schemeClr val="accent1"/>
+          </a:lnRef>
+          <a:fillRef idx="3">
+            <a:schemeClr val="accent1"/>
+          </a:fillRef>
+          <a:effectRef idx="2">
+            <a:schemeClr val="accent1"/>
+          </a:effectRef>
+          <a:fontRef idx="minor">
+            <a:schemeClr val="lt1"/>
+          </a:fontRef>
+        </p:style>
+        <p:txBody>
+          <a:bodyPr rtlCol="0" anchor="ctr"/>
+          <a:lstStyle/>
+          <a:p>
+            <a:pPr algn="ctr"/>
+          </a:p>
+        </p:txBody>
+      </p:sp>
+      <p:sp>
+        <p:nvSpPr>
+          <p:cNvPr id="3" name="Rectangle 2"/>
+          <p:cNvSpPr/>
+          <p:nvPr/>
+        </p:nvSpPr>
+        <p:spPr>
+          <a:xfrm>
+            <a:off x="0" y="0"/>
+            <a:ext cx="12191695" cy="73152"/>
+          </a:xfrm>
+          <a:prstGeom prst="rect">
+            <a:avLst/>
+          </a:prstGeom>
+          <a:solidFill>
+            <a:srgbClr val="E10600"/>
+          </a:solidFill>
+          <a:ln>
+            <a:noFill/>
+          </a:ln>
+        </p:spPr>
+        <p:style>
+          <a:lnRef idx="1">
+            <a:schemeClr val="accent1"/>
+          </a:lnRef>
+          <a:fillRef idx="3">
+            <a:schemeClr val="accent1"/>
+          </a:fillRef>
+          <a:effectRef idx="2">
+            <a:schemeClr val="accent1"/>
+          </a:effectRef>
+          <a:fontRef idx="minor">
+            <a:schemeClr val="lt1"/>
+          </a:fontRef>
+        </p:style>
+        <p:txBody>
+          <a:bodyPr rtlCol="0" anchor="ctr"/>
+          <a:lstStyle/>
+          <a:p>
+            <a:pPr algn="ctr"/>
+          </a:p>
+        </p:txBody>
+      </p:sp>
+      <p:sp>
+        <p:nvSpPr>
+          <p:cNvPr id="4" name="TextBox 3"/>
+          <p:cNvSpPr txBox="1"/>
+          <p:nvPr/>
+        </p:nvSpPr>
+        <p:spPr>
+          <a:xfrm>
+            <a:off x="502920" y="6510528"/>
+            <a:ext cx="7315200" cy="256032"/>
+          </a:xfrm>
+          <a:prstGeom prst="rect">
+            <a:avLst/>
+          </a:prstGeom>
+          <a:noFill/>
+        </p:spPr>
+        <p:txBody>
+          <a:bodyPr wrap="square">
+            <a:spAutoFit/>
+          </a:bodyPr>
+          <a:lstStyle/>
+          <a:p>
+            <a:pPr algn="l"/>
+            <a:r>
+              <a:rPr sz="1200" b="0">
+                <a:solidFill>
+                  <a:srgbClr val="5E5A55"/>
+                </a:solidFill>
+                <a:latin typeface="Calibri"/>
+              </a:rPr>
+              <a:t>Kmart Delivery Assist  ·  Managing Director</a:t>
+            </a:r>
+          </a:p>
+        </p:txBody>
+      </p:sp>
+      <p:sp>
+        <p:nvSpPr>
+          <p:cNvPr id="5" name="TextBox 4"/>
+          <p:cNvSpPr txBox="1"/>
+          <p:nvPr/>
+        </p:nvSpPr>
+        <p:spPr>
+          <a:xfrm>
+            <a:off x="9509760" y="6510528"/>
+            <a:ext cx="2194560" cy="256032"/>
+          </a:xfrm>
+          <a:prstGeom prst="rect">
+            <a:avLst/>
+          </a:prstGeom>
+          <a:noFill/>
+        </p:spPr>
+        <p:txBody>
+          <a:bodyPr wrap="square">
+            <a:spAutoFit/>
+          </a:bodyPr>
+          <a:lstStyle/>
+          <a:p>
+            <a:pPr algn="r"/>
+            <a:r>
+              <a:rPr sz="1200" b="0">
+                <a:solidFill>
+                  <a:srgbClr val="5E5A55"/>
+                </a:solidFill>
+                <a:latin typeface="Calibri"/>
+              </a:rPr>
+              <a:t>10  /  12</a:t>
+            </a:r>
+          </a:p>
+        </p:txBody>
+      </p:sp>
+      <p:sp>
+        <p:nvSpPr>
+          <p:cNvPr id="6" name="TextBox 5"/>
+          <p:cNvSpPr txBox="1"/>
+          <p:nvPr/>
+        </p:nvSpPr>
+        <p:spPr>
+          <a:xfrm>
+            <a:off x="502920" y="320040"/>
+            <a:ext cx="8229600" cy="274320"/>
+          </a:xfrm>
+          <a:prstGeom prst="rect">
+            <a:avLst/>
+          </a:prstGeom>
+          <a:noFill/>
+        </p:spPr>
+        <p:txBody>
+          <a:bodyPr wrap="square">
+            <a:spAutoFit/>
+          </a:bodyPr>
+          <a:lstStyle/>
+          <a:p>
+            <a:pPr algn="l"/>
+            <a:r>
+              <a:rPr sz="1400" b="1">
+                <a:solidFill>
+                  <a:srgbClr val="E10600"/>
+                </a:solidFill>
+                <a:latin typeface="Calibri"/>
+              </a:rPr>
+              <a:t>SAME EXCEPTIONS  ·  BUYER SIDE</a:t>
+            </a:r>
+          </a:p>
+        </p:txBody>
+      </p:sp>
+      <p:sp>
+        <p:nvSpPr>
+          <p:cNvPr id="7" name="TextBox 6"/>
+          <p:cNvSpPr txBox="1"/>
+          <p:nvPr/>
+        </p:nvSpPr>
+        <p:spPr>
+          <a:xfrm>
+            <a:off x="502920" y="640080"/>
+            <a:ext cx="11247120" cy="548640"/>
+          </a:xfrm>
+          <a:prstGeom prst="rect">
+            <a:avLst/>
+          </a:prstGeom>
+          <a:noFill/>
+        </p:spPr>
+        <p:txBody>
+          <a:bodyPr wrap="square">
+            <a:spAutoFit/>
+          </a:bodyPr>
+          <a:lstStyle/>
+          <a:p>
+            <a:pPr algn="l"/>
+            <a:r>
+              <a:rPr sz="2800" b="1">
+                <a:solidFill>
+                  <a:srgbClr val="1C1B1A"/>
+                </a:solidFill>
+                <a:latin typeface="Calibri"/>
+              </a:rPr>
+              <a:t>Before an order reaches a customer, the stock has to arrive.</a:t>
+            </a:r>
+          </a:p>
+        </p:txBody>
+      </p:sp>
+      <p:sp>
+        <p:nvSpPr>
+          <p:cNvPr id="8" name="Rectangle 7"/>
+          <p:cNvSpPr/>
+          <p:nvPr/>
+        </p:nvSpPr>
+        <p:spPr>
+          <a:xfrm>
+            <a:off x="502920" y="1463040"/>
+            <a:ext cx="6492240" cy="3840480"/>
+          </a:xfrm>
+          <a:prstGeom prst="rect">
+            <a:avLst/>
+          </a:prstGeom>
+          <a:noFill/>
+          <a:ln w="12700">
+            <a:solidFill>
+              <a:srgbClr val="E6E0D8"/>
+            </a:solidFill>
+          </a:ln>
+        </p:spPr>
+        <p:style>
+          <a:lnRef idx="1">
+            <a:schemeClr val="accent1"/>
+          </a:lnRef>
+          <a:fillRef idx="3">
+            <a:schemeClr val="accent1"/>
+          </a:fillRef>
+          <a:effectRef idx="2">
+            <a:schemeClr val="accent1"/>
+          </a:effectRef>
+          <a:fontRef idx="minor">
+            <a:schemeClr val="lt1"/>
+          </a:fontRef>
+        </p:style>
+        <p:txBody>
+          <a:bodyPr rtlCol="0" anchor="ctr"/>
+          <a:lstStyle/>
+          <a:p>
+            <a:pPr algn="ctr"/>
+          </a:p>
+        </p:txBody>
+      </p:sp>
+      <p:pic>
+        <p:nvPicPr>
+          <p:cNvPr id="9" name="Picture 8" descr="supplyhub_tracker.png"/>
+          <p:cNvPicPr>
+            <a:picLocks noChangeAspect="1"/>
+          </p:cNvPicPr>
+          <p:nvPr/>
+        </p:nvPicPr>
+        <p:blipFill>
+          <a:blip r:embed="rId2"/>
+          <a:stretch>
+            <a:fillRect/>
+          </a:stretch>
+        </p:blipFill>
+        <p:spPr>
+          <a:xfrm>
+            <a:off x="512064" y="1472184"/>
+            <a:ext cx="6473952" cy="3815355"/>
+          </a:xfrm>
+          <a:prstGeom prst="rect">
+            <a:avLst/>
+          </a:prstGeom>
+        </p:spPr>
+      </p:pic>
+      <p:sp>
+        <p:nvSpPr>
+          <p:cNvPr id="10" name="TextBox 9"/>
+          <p:cNvSpPr txBox="1"/>
+          <p:nvPr/>
+        </p:nvSpPr>
+        <p:spPr>
+          <a:xfrm>
+            <a:off x="502920" y="5394960"/>
+            <a:ext cx="6492240" cy="365760"/>
+          </a:xfrm>
+          <a:prstGeom prst="rect">
+            <a:avLst/>
+          </a:prstGeom>
+          <a:noFill/>
+        </p:spPr>
+        <p:txBody>
+          <a:bodyPr wrap="square">
+            <a:spAutoFit/>
+          </a:bodyPr>
+          <a:lstStyle/>
+          <a:p>
+            <a:pPr algn="l"/>
+            <a:r>
+              <a:rPr sz="1200" b="0">
+                <a:solidFill>
+                  <a:srgbClr val="5E5A55"/>
+                </a:solidFill>
+                <a:latin typeface="Calibri"/>
+              </a:rPr>
+              <a:t>Supply Hub · Delivery Tracker · Knit Throw, 9 days late (live SAP purchase order)</a:t>
+            </a:r>
+          </a:p>
+        </p:txBody>
+      </p:sp>
+      <p:sp>
+        <p:nvSpPr>
+          <p:cNvPr id="11" name="TextBox 10"/>
+          <p:cNvSpPr txBox="1"/>
+          <p:nvPr/>
+        </p:nvSpPr>
+        <p:spPr>
+          <a:xfrm>
+            <a:off x="7315200" y="1463040"/>
+            <a:ext cx="4389120" cy="365760"/>
+          </a:xfrm>
+          <a:prstGeom prst="rect">
+            <a:avLst/>
+          </a:prstGeom>
+          <a:noFill/>
+        </p:spPr>
+        <p:txBody>
+          <a:bodyPr wrap="square">
+            <a:spAutoFit/>
+          </a:bodyPr>
+          <a:lstStyle/>
+          <a:p>
+            <a:pPr algn="l"/>
+            <a:r>
+              <a:rPr sz="1800" b="1">
+                <a:solidFill>
+                  <a:srgbClr val="E10600"/>
+                </a:solidFill>
+                <a:latin typeface="Calibri"/>
+              </a:rPr>
+              <a:t>Delivery Tracker</a:t>
+            </a:r>
+          </a:p>
+        </p:txBody>
+      </p:sp>
+      <p:sp>
+        <p:nvSpPr>
+          <p:cNvPr id="12" name="TextBox 11"/>
+          <p:cNvSpPr txBox="1"/>
+          <p:nvPr/>
+        </p:nvSpPr>
+        <p:spPr>
+          <a:xfrm>
+            <a:off x="7315200" y="1847088"/>
+            <a:ext cx="4389120" cy="868680"/>
+          </a:xfrm>
+          <a:prstGeom prst="rect">
+            <a:avLst/>
+          </a:prstGeom>
+          <a:noFill/>
+        </p:spPr>
+        <p:txBody>
+          <a:bodyPr wrap="square">
+            <a:spAutoFit/>
+          </a:bodyPr>
+          <a:lstStyle/>
+          <a:p>
+            <a:pPr algn="l"/>
+            <a:r>
+              <a:rPr sz="1500" b="0">
+                <a:solidFill>
+                  <a:srgbClr val="1C1B1A"/>
+                </a:solidFill>
+                <a:latin typeface="Calibri"/>
+              </a:rPr>
+              <a:t>Inbound supplier orders on a map. SAP schedule lines flag a delay, short shipment, damage or supplier rejection.</a:t>
+            </a:r>
+          </a:p>
+        </p:txBody>
+      </p:sp>
+      <p:sp>
+        <p:nvSpPr>
+          <p:cNvPr id="13" name="TextBox 12"/>
+          <p:cNvSpPr txBox="1"/>
+          <p:nvPr/>
+        </p:nvSpPr>
+        <p:spPr>
+          <a:xfrm>
+            <a:off x="7315200" y="2788920"/>
+            <a:ext cx="4389120" cy="365760"/>
+          </a:xfrm>
+          <a:prstGeom prst="rect">
+            <a:avLst/>
+          </a:prstGeom>
+          <a:noFill/>
+        </p:spPr>
+        <p:txBody>
+          <a:bodyPr wrap="square">
+            <a:spAutoFit/>
+          </a:bodyPr>
+          <a:lstStyle/>
+          <a:p>
+            <a:pPr algn="l"/>
+            <a:r>
+              <a:rPr sz="1800" b="1">
+                <a:solidFill>
+                  <a:srgbClr val="E10600"/>
+                </a:solidFill>
+                <a:latin typeface="Calibri"/>
+              </a:rPr>
+              <a:t>Same recovery path</a:t>
+            </a:r>
+          </a:p>
+        </p:txBody>
+      </p:sp>
+      <p:sp>
+        <p:nvSpPr>
+          <p:cNvPr id="14" name="TextBox 13"/>
+          <p:cNvSpPr txBox="1"/>
+          <p:nvPr/>
+        </p:nvSpPr>
+        <p:spPr>
+          <a:xfrm>
+            <a:off x="7315200" y="3172968"/>
+            <a:ext cx="4389120" cy="868680"/>
+          </a:xfrm>
+          <a:prstGeom prst="rect">
+            <a:avLst/>
+          </a:prstGeom>
+          <a:noFill/>
+        </p:spPr>
+        <p:txBody>
+          <a:bodyPr wrap="square">
+            <a:spAutoFit/>
+          </a:bodyPr>
+          <a:lstStyle/>
+          <a:p>
+            <a:pPr algn="l"/>
+            <a:r>
+              <a:rPr sz="1500" b="0">
+                <a:solidFill>
+                  <a:srgbClr val="1C1B1A"/>
+                </a:solidFill>
+                <a:latin typeface="Calibri"/>
+              </a:rPr>
+              <a:t>Expedite, replace, refund or re-source, each built as SAP purchase-order changes.</a:t>
+            </a:r>
+          </a:p>
+        </p:txBody>
+      </p:sp>
+      <p:sp>
+        <p:nvSpPr>
+          <p:cNvPr id="15" name="TextBox 14"/>
+          <p:cNvSpPr txBox="1"/>
+          <p:nvPr/>
+        </p:nvSpPr>
+        <p:spPr>
+          <a:xfrm>
+            <a:off x="7315200" y="4114800"/>
+            <a:ext cx="4389120" cy="365760"/>
+          </a:xfrm>
+          <a:prstGeom prst="rect">
+            <a:avLst/>
+          </a:prstGeom>
+          <a:noFill/>
+        </p:spPr>
+        <p:txBody>
+          <a:bodyPr wrap="square">
+            <a:spAutoFit/>
+          </a:bodyPr>
+          <a:lstStyle/>
+          <a:p>
+            <a:pPr algn="l"/>
+            <a:r>
+              <a:rPr sz="1800" b="1">
+                <a:solidFill>
+                  <a:srgbClr val="E10600"/>
+                </a:solidFill>
+                <a:latin typeface="Calibri"/>
+              </a:rPr>
+              <a:t>Mix-Lock</a:t>
+            </a:r>
+          </a:p>
+        </p:txBody>
+      </p:sp>
+      <p:sp>
+        <p:nvSpPr>
+          <p:cNvPr id="16" name="TextBox 15"/>
+          <p:cNvSpPr txBox="1"/>
+          <p:nvPr/>
+        </p:nvSpPr>
+        <p:spPr>
+          <a:xfrm>
+            <a:off x="7315200" y="4498848"/>
+            <a:ext cx="4389120" cy="868680"/>
+          </a:xfrm>
+          <a:prstGeom prst="rect">
+            <a:avLst/>
+          </a:prstGeom>
+          <a:noFill/>
+        </p:spPr>
+        <p:txBody>
+          <a:bodyPr wrap="square">
+            <a:spAutoFit/>
+          </a:bodyPr>
+          <a:lstStyle/>
+          <a:p>
+            <a:pPr algn="l"/>
+            <a:r>
+              <a:rPr sz="1500" b="0">
+                <a:solidFill>
+                  <a:srgbClr val="1C1B1A"/>
+                </a:solidFill>
+                <a:latin typeface="Calibri"/>
+              </a:rPr>
+              <a:t>Defers the Anko colour and size split until early sell-through is in. Knit Throw markdown risk: $2,218 to $605.</a:t>
+            </a:r>
+          </a:p>
+        </p:txBody>
+      </p:sp>
+    </p:spTree>
+  </p:cSld>
+  <p:clrMapOvr>
+    <a:masterClrMapping/>
+  </p:clrMapOvr>
+</p:sld>
+</file>
+
+<file path=ppt/slides/slide11.xml><?xml version="1.0" encoding="utf-8"?>
+<p:sld xmlns:a="http://schemas.openxmlformats.org/drawingml/2006/main" xmlns:p="http://schemas.openxmlformats.org/presentationml/2006/main" xmlns:r="http://schemas.openxmlformats.org/officeDocument/2006/relationships">
+  <p:cSld>
+    <p:spTree>
+      <p:nvGrpSpPr>
+        <p:cNvPr id="1" name=""/>
+        <p:cNvGrpSpPr/>
+        <p:nvPr/>
+      </p:nvGrpSpPr>
+      <p:grpSpPr/>
+      <p:sp>
+        <p:nvSpPr>
+          <p:cNvPr id="2" name="Rectangle 1"/>
+          <p:cNvSpPr/>
+          <p:nvPr/>
+        </p:nvSpPr>
+        <p:spPr>
+          <a:xfrm>
+            <a:off x="0" y="0"/>
+            <a:ext cx="12191695" cy="6858000"/>
+          </a:xfrm>
+          <a:prstGeom prst="rect">
+            <a:avLst/>
+          </a:prstGeom>
+          <a:solidFill>
+            <a:srgbClr val="FFFFFF"/>
+          </a:solidFill>
+          <a:ln>
+            <a:noFill/>
+          </a:ln>
+        </p:spPr>
+        <p:style>
+          <a:lnRef idx="1">
+            <a:schemeClr val="accent1"/>
+          </a:lnRef>
+          <a:fillRef idx="3">
+            <a:schemeClr val="accent1"/>
+          </a:fillRef>
+          <a:effectRef idx="2">
+            <a:schemeClr val="accent1"/>
+          </a:effectRef>
+          <a:fontRef idx="minor">
+            <a:schemeClr val="lt1"/>
+          </a:fontRef>
+        </p:style>
+        <p:txBody>
+          <a:bodyPr rtlCol="0" anchor="ctr"/>
+          <a:lstStyle/>
+          <a:p>
+            <a:pPr algn="ctr"/>
+          </a:p>
+        </p:txBody>
+      </p:sp>
+      <p:sp>
+        <p:nvSpPr>
+          <p:cNvPr id="3" name="Rectangle 2"/>
+          <p:cNvSpPr/>
+          <p:nvPr/>
+        </p:nvSpPr>
+        <p:spPr>
+          <a:xfrm>
+            <a:off x="0" y="0"/>
+            <a:ext cx="12191695" cy="73152"/>
+          </a:xfrm>
+          <a:prstGeom prst="rect">
+            <a:avLst/>
+          </a:prstGeom>
+          <a:solidFill>
+            <a:srgbClr val="E10600"/>
+          </a:solidFill>
+          <a:ln>
+            <a:noFill/>
+          </a:ln>
+        </p:spPr>
+        <p:style>
+          <a:lnRef idx="1">
+            <a:schemeClr val="accent1"/>
+          </a:lnRef>
+          <a:fillRef idx="3">
+            <a:schemeClr val="accent1"/>
+          </a:fillRef>
+          <a:effectRef idx="2">
+            <a:schemeClr val="accent1"/>
+          </a:effectRef>
+          <a:fontRef idx="minor">
+            <a:schemeClr val="lt1"/>
+          </a:fontRef>
+        </p:style>
+        <p:txBody>
+          <a:bodyPr rtlCol="0" anchor="ctr"/>
+          <a:lstStyle/>
+          <a:p>
+            <a:pPr algn="ctr"/>
+          </a:p>
+        </p:txBody>
+      </p:sp>
+      <p:sp>
+        <p:nvSpPr>
+          <p:cNvPr id="4" name="TextBox 3"/>
+          <p:cNvSpPr txBox="1"/>
+          <p:nvPr/>
+        </p:nvSpPr>
+        <p:spPr>
+          <a:xfrm>
+            <a:off x="502920" y="6510528"/>
+            <a:ext cx="7315200" cy="256032"/>
+          </a:xfrm>
+          <a:prstGeom prst="rect">
+            <a:avLst/>
+          </a:prstGeom>
+          <a:noFill/>
+        </p:spPr>
+        <p:txBody>
+          <a:bodyPr wrap="square">
+            <a:spAutoFit/>
+          </a:bodyPr>
+          <a:lstStyle/>
+          <a:p>
+            <a:pPr algn="l"/>
+            <a:r>
+              <a:rPr sz="1200" b="0">
+                <a:solidFill>
+                  <a:srgbClr val="5E5A55"/>
+                </a:solidFill>
+                <a:latin typeface="Calibri"/>
+              </a:rPr>
+              <a:t>Kmart Delivery Assist  ·  Managing Director</a:t>
+            </a:r>
+          </a:p>
+        </p:txBody>
+      </p:sp>
+      <p:sp>
+        <p:nvSpPr>
+          <p:cNvPr id="5" name="TextBox 4"/>
+          <p:cNvSpPr txBox="1"/>
+          <p:nvPr/>
+        </p:nvSpPr>
+        <p:spPr>
+          <a:xfrm>
+            <a:off x="9509760" y="6510528"/>
+            <a:ext cx="2194560" cy="256032"/>
+          </a:xfrm>
+          <a:prstGeom prst="rect">
+            <a:avLst/>
+          </a:prstGeom>
+          <a:noFill/>
+        </p:spPr>
+        <p:txBody>
+          <a:bodyPr wrap="square">
+            <a:spAutoFit/>
+          </a:bodyPr>
+          <a:lstStyle/>
+          <a:p>
+            <a:pPr algn="r"/>
+            <a:r>
+              <a:rPr sz="1200" b="0">
+                <a:solidFill>
+                  <a:srgbClr val="5E5A55"/>
+                </a:solidFill>
+                <a:latin typeface="Calibri"/>
+              </a:rPr>
+              <a:t>11  /  12</a:t>
+            </a:r>
+          </a:p>
+        </p:txBody>
+      </p:sp>
+      <p:sp>
+        <p:nvSpPr>
+          <p:cNvPr id="6" name="TextBox 5"/>
+          <p:cNvSpPr txBox="1"/>
+          <p:nvPr/>
+        </p:nvSpPr>
+        <p:spPr>
+          <a:xfrm>
+            <a:off x="502920" y="320040"/>
+            <a:ext cx="3657600" cy="274320"/>
+          </a:xfrm>
+          <a:prstGeom prst="rect">
+            <a:avLst/>
+          </a:prstGeom>
+          <a:noFill/>
+        </p:spPr>
+        <p:txBody>
+          <a:bodyPr wrap="square">
+            <a:spAutoFit/>
+          </a:bodyPr>
+          <a:lstStyle/>
+          <a:p>
+            <a:pPr algn="l"/>
+            <a:r>
+              <a:rPr sz="1400" b="1">
+                <a:solidFill>
+                  <a:srgbClr val="E10600"/>
+                </a:solidFill>
+                <a:latin typeface="Calibri"/>
+              </a:rPr>
+              <a:t>THE ASK</a:t>
+            </a:r>
+          </a:p>
+        </p:txBody>
+      </p:sp>
+      <p:sp>
+        <p:nvSpPr>
+          <p:cNvPr id="7" name="TextBox 6"/>
+          <p:cNvSpPr txBox="1"/>
+          <p:nvPr/>
+        </p:nvSpPr>
+        <p:spPr>
+          <a:xfrm>
+            <a:off x="502920" y="731520"/>
+            <a:ext cx="10972800" cy="1097280"/>
+          </a:xfrm>
+          <a:prstGeom prst="rect">
+            <a:avLst/>
+          </a:prstGeom>
+          <a:noFill/>
+        </p:spPr>
+        <p:txBody>
+          <a:bodyPr wrap="square">
+            <a:spAutoFit/>
+          </a:bodyPr>
+          <a:lstStyle/>
+          <a:p>
+            <a:pPr algn="l"/>
+            <a:r>
+              <a:rPr sz="3400" b="1">
+                <a:solidFill>
+                  <a:srgbClr val="1C1B1A"/>
+                </a:solidFill>
+                <a:latin typeface="Calibri"/>
+              </a:rPr>
+              <a:t>Use this as the customer face
+of exception recovery.</a:t>
+            </a:r>
+          </a:p>
+        </p:txBody>
+      </p:sp>
+      <p:sp>
+        <p:nvSpPr>
+          <p:cNvPr id="8" name="TextBox 7"/>
+          <p:cNvSpPr txBox="1"/>
+          <p:nvPr/>
+        </p:nvSpPr>
+        <p:spPr>
+          <a:xfrm>
+            <a:off x="502920" y="2468880"/>
+            <a:ext cx="2194560" cy="640080"/>
+          </a:xfrm>
+          <a:prstGeom prst="rect">
+            <a:avLst/>
+          </a:prstGeom>
+          <a:noFill/>
+        </p:spPr>
+        <p:txBody>
+          <a:bodyPr wrap="square">
+            <a:spAutoFit/>
+          </a:bodyPr>
+          <a:lstStyle/>
+          <a:p>
+            <a:pPr algn="l"/>
+            <a:r>
+              <a:rPr sz="2200" b="1">
+                <a:solidFill>
+                  <a:srgbClr val="E10600"/>
+                </a:solidFill>
+                <a:latin typeface="Calibri"/>
+              </a:rPr>
+              <a:t>Today</a:t>
+            </a:r>
+          </a:p>
+        </p:txBody>
+      </p:sp>
+      <p:sp>
+        <p:nvSpPr>
+          <p:cNvPr id="9" name="TextBox 8"/>
+          <p:cNvSpPr txBox="1"/>
+          <p:nvPr/>
+        </p:nvSpPr>
+        <p:spPr>
+          <a:xfrm>
+            <a:off x="2834640" y="2468880"/>
+            <a:ext cx="8503920" cy="822960"/>
+          </a:xfrm>
+          <a:prstGeom prst="rect">
+            <a:avLst/>
+          </a:prstGeom>
+          <a:noFill/>
+        </p:spPr>
+        <p:txBody>
+          <a:bodyPr wrap="square">
+            <a:spAutoFit/>
+          </a:bodyPr>
+          <a:lstStyle/>
+          <a:p>
+            <a:pPr algn="l"/>
+            <a:r>
+              <a:rPr sz="2200" b="0">
+                <a:solidFill>
+                  <a:srgbClr val="1C1B1A"/>
+                </a:solidFill>
+                <a:latin typeface="Calibri"/>
+              </a:rPr>
+              <a:t>A customer can finish a damaged, missed or missing delivery without a call.</a:t>
+            </a:r>
+          </a:p>
+        </p:txBody>
+      </p:sp>
+      <p:sp>
+        <p:nvSpPr>
+          <p:cNvPr id="10" name="TextBox 9"/>
+          <p:cNvSpPr txBox="1"/>
+          <p:nvPr/>
+        </p:nvSpPr>
+        <p:spPr>
+          <a:xfrm>
+            <a:off x="502920" y="3611880"/>
+            <a:ext cx="2194560" cy="640080"/>
+          </a:xfrm>
+          <a:prstGeom prst="rect">
+            <a:avLst/>
+          </a:prstGeom>
+          <a:noFill/>
+        </p:spPr>
+        <p:txBody>
+          <a:bodyPr wrap="square">
+            <a:spAutoFit/>
+          </a:bodyPr>
+          <a:lstStyle/>
+          <a:p>
+            <a:pPr algn="l"/>
+            <a:r>
+              <a:rPr sz="2200" b="1">
+                <a:solidFill>
+                  <a:srgbClr val="E10600"/>
+                </a:solidFill>
+                <a:latin typeface="Calibri"/>
+              </a:rPr>
+              <a:t>Next</a:t>
+            </a:r>
+          </a:p>
+        </p:txBody>
+      </p:sp>
+      <p:sp>
+        <p:nvSpPr>
+          <p:cNvPr id="11" name="TextBox 10"/>
+          <p:cNvSpPr txBox="1"/>
+          <p:nvPr/>
+        </p:nvSpPr>
+        <p:spPr>
+          <a:xfrm>
+            <a:off x="2834640" y="3611880"/>
+            <a:ext cx="8503920" cy="822960"/>
+          </a:xfrm>
+          <a:prstGeom prst="rect">
+            <a:avLst/>
+          </a:prstGeom>
+          <a:noFill/>
+        </p:spPr>
+        <p:txBody>
+          <a:bodyPr wrap="square">
+            <a:spAutoFit/>
+          </a:bodyPr>
+          <a:lstStyle/>
+          <a:p>
+            <a:pPr algn="l"/>
+            <a:r>
+              <a:rPr sz="2200" b="0">
+                <a:solidFill>
+                  <a:srgbClr val="1C1B1A"/>
+                </a:solidFill>
+                <a:latin typeface="Calibri"/>
+              </a:rPr>
+              <a:t>Supply Hub brings the same recovery to inbound supplier orders. Decision data and routing stay on the programme.</a:t>
+            </a:r>
+          </a:p>
+        </p:txBody>
+      </p:sp>
+      <p:sp>
+        <p:nvSpPr>
+          <p:cNvPr id="12" name="TextBox 11"/>
+          <p:cNvSpPr txBox="1"/>
+          <p:nvPr/>
+        </p:nvSpPr>
+        <p:spPr>
+          <a:xfrm>
+            <a:off x="502920" y="4754880"/>
+            <a:ext cx="2194560" cy="640080"/>
+          </a:xfrm>
+          <a:prstGeom prst="rect">
+            <a:avLst/>
+          </a:prstGeom>
+          <a:noFill/>
+        </p:spPr>
+        <p:txBody>
+          <a:bodyPr wrap="square">
+            <a:spAutoFit/>
+          </a:bodyPr>
+          <a:lstStyle/>
+          <a:p>
+            <a:pPr algn="l"/>
+            <a:r>
+              <a:rPr sz="2200" b="1">
+                <a:solidFill>
+                  <a:srgbClr val="E10600"/>
+                </a:solidFill>
+                <a:latin typeface="Calibri"/>
+              </a:rPr>
+              <a:t>Guardrail</a:t>
+            </a:r>
+          </a:p>
+        </p:txBody>
+      </p:sp>
+      <p:sp>
+        <p:nvSpPr>
+          <p:cNvPr id="13" name="TextBox 12"/>
+          <p:cNvSpPr txBox="1"/>
+          <p:nvPr/>
+        </p:nvSpPr>
+        <p:spPr>
+          <a:xfrm>
+            <a:off x="2834640" y="4754880"/>
+            <a:ext cx="8503920" cy="822960"/>
+          </a:xfrm>
+          <a:prstGeom prst="rect">
+            <a:avLst/>
+          </a:prstGeom>
+          <a:noFill/>
+        </p:spPr>
+        <p:txBody>
+          <a:bodyPr wrap="square">
+            <a:spAutoFit/>
+          </a:bodyPr>
+          <a:lstStyle/>
+          <a:p>
+            <a:pPr algn="l"/>
+            <a:r>
+              <a:rPr sz="2200" b="0">
+                <a:solidFill>
+                  <a:srgbClr val="1C1B1A"/>
+                </a:solidFill>
+                <a:latin typeface="Calibri"/>
+              </a:rPr>
+              <a:t>A refund is explicit. A healthy order is not turned into a case.</a:t>
+            </a:r>
+          </a:p>
+        </p:txBody>
+      </p:sp>
+    </p:spTree>
+  </p:cSld>
+  <p:clrMapOvr>
+    <a:masterClrMapping/>
+  </p:clrMapOvr>
+</p:sld>
+</file>
+
+<file path=ppt/slides/slide12.xml><?xml version="1.0" encoding="utf-8"?>
+<p:sld xmlns:a="http://schemas.openxmlformats.org/drawingml/2006/main" xmlns:p="http://schemas.openxmlformats.org/presentationml/2006/main" xmlns:r="http://schemas.openxmlformats.org/officeDocument/2006/relationships">
+  <p:cSld>
+    <p:spTree>
+      <p:nvGrpSpPr>
+        <p:cNvPr id="1" name=""/>
+        <p:cNvGrpSpPr/>
+        <p:nvPr/>
+      </p:nvGrpSpPr>
+      <p:grpSpPr/>
+      <p:sp>
+        <p:nvSpPr>
+          <p:cNvPr id="2" name="Rectangle 1"/>
+          <p:cNvSpPr/>
+          <p:nvPr/>
+        </p:nvSpPr>
+        <p:spPr>
+          <a:xfrm>
+            <a:off x="0" y="0"/>
+            <a:ext cx="12191695" cy="6858000"/>
+          </a:xfrm>
+          <a:prstGeom prst="rect">
+            <a:avLst/>
+          </a:prstGeom>
+          <a:solidFill>
+            <a:srgbClr val="FFFFFF"/>
+          </a:solidFill>
+          <a:ln>
+            <a:noFill/>
+          </a:ln>
+        </p:spPr>
+        <p:style>
+          <a:lnRef idx="1">
+            <a:schemeClr val="accent1"/>
+          </a:lnRef>
+          <a:fillRef idx="3">
+            <a:schemeClr val="accent1"/>
+          </a:fillRef>
+          <a:effectRef idx="2">
+            <a:schemeClr val="accent1"/>
+          </a:effectRef>
+          <a:fontRef idx="minor">
+            <a:schemeClr val="lt1"/>
+          </a:fontRef>
+        </p:style>
+        <p:txBody>
+          <a:bodyPr rtlCol="0" anchor="ctr"/>
+          <a:lstStyle/>
+          <a:p>
+            <a:pPr algn="ctr"/>
+          </a:p>
+        </p:txBody>
+      </p:sp>
+      <p:sp>
+        <p:nvSpPr>
+          <p:cNvPr id="3" name="Rectangle 2"/>
+          <p:cNvSpPr/>
+          <p:nvPr/>
+        </p:nvSpPr>
+        <p:spPr>
+          <a:xfrm>
+            <a:off x="0" y="0"/>
+            <a:ext cx="12191695" cy="73152"/>
+          </a:xfrm>
+          <a:prstGeom prst="rect">
+            <a:avLst/>
+          </a:prstGeom>
+          <a:solidFill>
+            <a:srgbClr val="E10600"/>
+          </a:solidFill>
+          <a:ln>
+            <a:noFill/>
+          </a:ln>
+        </p:spPr>
+        <p:style>
+          <a:lnRef idx="1">
+            <a:schemeClr val="accent1"/>
+          </a:lnRef>
+          <a:fillRef idx="3">
+            <a:schemeClr val="accent1"/>
+          </a:fillRef>
+          <a:effectRef idx="2">
+            <a:schemeClr val="accent1"/>
+          </a:effectRef>
+          <a:fontRef idx="minor">
+            <a:schemeClr val="lt1"/>
+          </a:fontRef>
+        </p:style>
+        <p:txBody>
+          <a:bodyPr rtlCol="0" anchor="ctr"/>
+          <a:lstStyle/>
+          <a:p>
+            <a:pPr algn="ctr"/>
+          </a:p>
+        </p:txBody>
+      </p:sp>
+      <p:sp>
+        <p:nvSpPr>
+          <p:cNvPr id="4" name="TextBox 3"/>
+          <p:cNvSpPr txBox="1"/>
+          <p:nvPr/>
+        </p:nvSpPr>
+        <p:spPr>
+          <a:xfrm>
+            <a:off x="502920" y="6510528"/>
+            <a:ext cx="7315200" cy="256032"/>
+          </a:xfrm>
+          <a:prstGeom prst="rect">
+            <a:avLst/>
+          </a:prstGeom>
+          <a:noFill/>
+        </p:spPr>
+        <p:txBody>
+          <a:bodyPr wrap="square">
+            <a:spAutoFit/>
+          </a:bodyPr>
+          <a:lstStyle/>
+          <a:p>
+            <a:pPr algn="l"/>
+            <a:r>
+              <a:rPr sz="1200" b="0">
+                <a:solidFill>
+                  <a:srgbClr val="5E5A55"/>
+                </a:solidFill>
+                <a:latin typeface="Calibri"/>
+              </a:rPr>
+              <a:t>Kmart Delivery Assist  ·  Managing Director</a:t>
+            </a:r>
+          </a:p>
+        </p:txBody>
+      </p:sp>
+      <p:sp>
+        <p:nvSpPr>
+          <p:cNvPr id="5" name="TextBox 4"/>
+          <p:cNvSpPr txBox="1"/>
+          <p:nvPr/>
+        </p:nvSpPr>
+        <p:spPr>
+          <a:xfrm>
+            <a:off x="9509760" y="6510528"/>
+            <a:ext cx="2194560" cy="256032"/>
+          </a:xfrm>
+          <a:prstGeom prst="rect">
+            <a:avLst/>
+          </a:prstGeom>
+          <a:noFill/>
+        </p:spPr>
+        <p:txBody>
+          <a:bodyPr wrap="square">
+            <a:spAutoFit/>
+          </a:bodyPr>
+          <a:lstStyle/>
+          <a:p>
+            <a:pPr algn="r"/>
+            <a:r>
+              <a:rPr sz="1200" b="0">
+                <a:solidFill>
+                  <a:srgbClr val="5E5A55"/>
+                </a:solidFill>
+                <a:latin typeface="Calibri"/>
+              </a:rPr>
+              <a:t>12  /  12</a:t>
+            </a:r>
+          </a:p>
+        </p:txBody>
+      </p:sp>
+      <p:sp>
+        <p:nvSpPr>
+          <p:cNvPr id="6" name="TextBox 5"/>
+          <p:cNvSpPr txBox="1"/>
+          <p:nvPr/>
+        </p:nvSpPr>
+        <p:spPr>
+          <a:xfrm>
+            <a:off x="502920" y="320040"/>
+            <a:ext cx="8229600" cy="274320"/>
+          </a:xfrm>
+          <a:prstGeom prst="rect">
+            <a:avLst/>
+          </a:prstGeom>
+          <a:noFill/>
+        </p:spPr>
+        <p:txBody>
+          <a:bodyPr wrap="square">
+            <a:spAutoFit/>
+          </a:bodyPr>
+          <a:lstStyle/>
+          <a:p>
+            <a:pPr algn="l"/>
+            <a:r>
+              <a:rPr sz="1400" b="1">
+                <a:solidFill>
+                  <a:srgbClr val="E10600"/>
+                </a:solidFill>
+                <a:latin typeface="Calibri"/>
+              </a:rPr>
+              <a:t>IF THE DEMO FAILS  ·  ORDER KM185002</a:t>
+            </a:r>
+          </a:p>
+        </p:txBody>
+      </p:sp>
+      <p:sp>
+        <p:nvSpPr>
+          <p:cNvPr id="7" name="TextBox 6"/>
+          <p:cNvSpPr txBox="1"/>
+          <p:nvPr/>
+        </p:nvSpPr>
+        <p:spPr>
+          <a:xfrm>
+            <a:off x="502920" y="640080"/>
+            <a:ext cx="10972800" cy="548640"/>
+          </a:xfrm>
+          <a:prstGeom prst="rect">
+            <a:avLst/>
+          </a:prstGeom>
+          <a:noFill/>
+        </p:spPr>
+        <p:txBody>
+          <a:bodyPr wrap="square">
+            <a:spAutoFit/>
+          </a:bodyPr>
+          <a:lstStyle/>
+          <a:p>
+            <a:pPr algn="l"/>
+            <a:r>
+              <a:rPr sz="2600" b="1">
+                <a:solidFill>
+                  <a:srgbClr val="1C1B1A"/>
+                </a:solidFill>
+                <a:latin typeface="Calibri"/>
+              </a:rPr>
+              <a:t>The same journey, screen by screen.</a:t>
+            </a:r>
+          </a:p>
+        </p:txBody>
+      </p:sp>
+      <p:sp>
+        <p:nvSpPr>
+          <p:cNvPr id="8" name="Rectangle 7"/>
+          <p:cNvSpPr/>
+          <p:nvPr/>
+        </p:nvSpPr>
+        <p:spPr>
+          <a:xfrm>
+            <a:off x="502920" y="1417320"/>
+            <a:ext cx="2103120" cy="4572000"/>
+          </a:xfrm>
+          <a:prstGeom prst="rect">
+            <a:avLst/>
+          </a:prstGeom>
+          <a:noFill/>
+          <a:ln w="12700">
+            <a:solidFill>
+              <a:srgbClr val="E6E0D8"/>
+            </a:solidFill>
+          </a:ln>
+        </p:spPr>
+        <p:style>
+          <a:lnRef idx="1">
+            <a:schemeClr val="accent1"/>
+          </a:lnRef>
+          <a:fillRef idx="3">
+            <a:schemeClr val="accent1"/>
+          </a:fillRef>
+          <a:effectRef idx="2">
+            <a:schemeClr val="accent1"/>
+          </a:effectRef>
+          <a:fontRef idx="minor">
+            <a:schemeClr val="lt1"/>
+          </a:fontRef>
+        </p:style>
+        <p:txBody>
+          <a:bodyPr rtlCol="0" anchor="ctr"/>
+          <a:lstStyle/>
+          <a:p>
+            <a:pPr algn="ctr"/>
+          </a:p>
+        </p:txBody>
+      </p:sp>
+      <p:pic>
+        <p:nvPicPr>
+          <p:cNvPr id="9" name="Picture 8" descr="assist_1_understand.png"/>
+          <p:cNvPicPr>
+            <a:picLocks noChangeAspect="1"/>
+          </p:cNvPicPr>
+          <p:nvPr/>
+        </p:nvPicPr>
+        <p:blipFill>
+          <a:blip r:embed="rId2"/>
+          <a:srcRect b="6391"/>
+          <a:stretch>
+            <a:fillRect/>
+          </a:stretch>
+        </p:blipFill>
+        <p:spPr>
+          <a:xfrm>
+            <a:off x="512064" y="1426464"/>
+            <a:ext cx="2084831" cy="4553712"/>
+          </a:xfrm>
+          <a:prstGeom prst="rect">
+            <a:avLst/>
+          </a:prstGeom>
+        </p:spPr>
+      </p:pic>
+      <p:sp>
+        <p:nvSpPr>
+          <p:cNvPr id="10" name="TextBox 9"/>
+          <p:cNvSpPr txBox="1"/>
+          <p:nvPr/>
+        </p:nvSpPr>
+        <p:spPr>
+          <a:xfrm>
+            <a:off x="502920" y="6053328"/>
+            <a:ext cx="2103120" cy="365760"/>
+          </a:xfrm>
+          <a:prstGeom prst="rect">
+            <a:avLst/>
+          </a:prstGeom>
+          <a:noFill/>
+        </p:spPr>
+        <p:txBody>
+          <a:bodyPr wrap="square">
+            <a:spAutoFit/>
+          </a:bodyPr>
+          <a:lstStyle/>
+          <a:p>
+            <a:pPr algn="l"/>
+            <a:r>
+              <a:rPr sz="1200" b="0">
+                <a:solidFill>
+                  <a:srgbClr val="5E5A55"/>
+                </a:solidFill>
+                <a:latin typeface="Calibri"/>
+              </a:rPr>
+              <a:t>2  Understand</a:t>
+            </a:r>
+          </a:p>
+        </p:txBody>
+      </p:sp>
+      <p:sp>
+        <p:nvSpPr>
+          <p:cNvPr id="11" name="Rectangle 10"/>
+          <p:cNvSpPr/>
+          <p:nvPr/>
+        </p:nvSpPr>
+        <p:spPr>
+          <a:xfrm>
+            <a:off x="2788920" y="1417320"/>
+            <a:ext cx="2103120" cy="4572000"/>
+          </a:xfrm>
+          <a:prstGeom prst="rect">
+            <a:avLst/>
+          </a:prstGeom>
+          <a:noFill/>
+          <a:ln w="12700">
+            <a:solidFill>
+              <a:srgbClr val="E6E0D8"/>
+            </a:solidFill>
+          </a:ln>
+        </p:spPr>
+        <p:style>
+          <a:lnRef idx="1">
+            <a:schemeClr val="accent1"/>
+          </a:lnRef>
+          <a:fillRef idx="3">
+            <a:schemeClr val="accent1"/>
+          </a:fillRef>
+          <a:effectRef idx="2">
+            <a:schemeClr val="accent1"/>
+          </a:effectRef>
+          <a:fontRef idx="minor">
+            <a:schemeClr val="lt1"/>
+          </a:fontRef>
+        </p:style>
+        <p:txBody>
+          <a:bodyPr rtlCol="0" anchor="ctr"/>
+          <a:lstStyle/>
+          <a:p>
+            <a:pPr algn="ctr"/>
+          </a:p>
+        </p:txBody>
+      </p:sp>
+      <p:pic>
+        <p:nvPicPr>
+          <p:cNvPr id="12" name="Picture 11" descr="assist_2_problem.png"/>
+          <p:cNvPicPr>
+            <a:picLocks noChangeAspect="1"/>
+          </p:cNvPicPr>
+          <p:nvPr/>
+        </p:nvPicPr>
+        <p:blipFill>
+          <a:blip r:embed="rId3"/>
+          <a:srcRect b="6391"/>
+          <a:stretch>
+            <a:fillRect/>
+          </a:stretch>
+        </p:blipFill>
+        <p:spPr>
+          <a:xfrm>
+            <a:off x="2798064" y="1426464"/>
+            <a:ext cx="2084831" cy="4553712"/>
+          </a:xfrm>
+          <a:prstGeom prst="rect">
+            <a:avLst/>
+          </a:prstGeom>
+        </p:spPr>
+      </p:pic>
+      <p:sp>
+        <p:nvSpPr>
+          <p:cNvPr id="13" name="TextBox 12"/>
+          <p:cNvSpPr txBox="1"/>
+          <p:nvPr/>
+        </p:nvSpPr>
+        <p:spPr>
+          <a:xfrm>
+            <a:off x="2788920" y="6053328"/>
+            <a:ext cx="2103120" cy="365760"/>
+          </a:xfrm>
+          <a:prstGeom prst="rect">
+            <a:avLst/>
+          </a:prstGeom>
+          <a:noFill/>
+        </p:spPr>
+        <p:txBody>
+          <a:bodyPr wrap="square">
+            <a:spAutoFit/>
+          </a:bodyPr>
+          <a:lstStyle/>
+          <a:p>
+            <a:pPr algn="l"/>
+            <a:r>
+              <a:rPr sz="1200" b="0">
+                <a:solidFill>
+                  <a:srgbClr val="5E5A55"/>
+                </a:solidFill>
+                <a:latin typeface="Calibri"/>
+              </a:rPr>
+              <a:t>3  Identify the problem</a:t>
+            </a:r>
+          </a:p>
+        </p:txBody>
+      </p:sp>
+      <p:sp>
+        <p:nvSpPr>
+          <p:cNvPr id="14" name="Rectangle 13"/>
+          <p:cNvSpPr/>
+          <p:nvPr/>
+        </p:nvSpPr>
+        <p:spPr>
+          <a:xfrm>
+            <a:off x="5074920" y="1417320"/>
+            <a:ext cx="2103120" cy="4572000"/>
+          </a:xfrm>
+          <a:prstGeom prst="rect">
+            <a:avLst/>
+          </a:prstGeom>
+          <a:noFill/>
+          <a:ln w="12700">
+            <a:solidFill>
+              <a:srgbClr val="E6E0D8"/>
+            </a:solidFill>
+          </a:ln>
+        </p:spPr>
+        <p:style>
+          <a:lnRef idx="1">
+            <a:schemeClr val="accent1"/>
+          </a:lnRef>
+          <a:fillRef idx="3">
+            <a:schemeClr val="accent1"/>
+          </a:fillRef>
+          <a:effectRef idx="2">
+            <a:schemeClr val="accent1"/>
+          </a:effectRef>
+          <a:fontRef idx="minor">
+            <a:schemeClr val="lt1"/>
+          </a:fontRef>
+        </p:style>
+        <p:txBody>
+          <a:bodyPr rtlCol="0" anchor="ctr"/>
+          <a:lstStyle/>
+          <a:p>
+            <a:pPr algn="ctr"/>
+          </a:p>
+        </p:txBody>
+      </p:sp>
+      <p:pic>
+        <p:nvPicPr>
+          <p:cNvPr id="15" name="Picture 14" descr="assist_3_choose.png"/>
+          <p:cNvPicPr>
+            <a:picLocks noChangeAspect="1"/>
+          </p:cNvPicPr>
+          <p:nvPr/>
+        </p:nvPicPr>
+        <p:blipFill>
+          <a:blip r:embed="rId4"/>
+          <a:srcRect b="6391"/>
+          <a:stretch>
+            <a:fillRect/>
+          </a:stretch>
+        </p:blipFill>
+        <p:spPr>
+          <a:xfrm>
+            <a:off x="5084064" y="1426464"/>
+            <a:ext cx="2084831" cy="4553712"/>
+          </a:xfrm>
+          <a:prstGeom prst="rect">
+            <a:avLst/>
+          </a:prstGeom>
+        </p:spPr>
+      </p:pic>
+      <p:sp>
+        <p:nvSpPr>
+          <p:cNvPr id="16" name="TextBox 15"/>
+          <p:cNvSpPr txBox="1"/>
+          <p:nvPr/>
+        </p:nvSpPr>
+        <p:spPr>
+          <a:xfrm>
+            <a:off x="5074920" y="6053328"/>
+            <a:ext cx="2103120" cy="365760"/>
+          </a:xfrm>
+          <a:prstGeom prst="rect">
+            <a:avLst/>
+          </a:prstGeom>
+          <a:noFill/>
+        </p:spPr>
+        <p:txBody>
+          <a:bodyPr wrap="square">
+            <a:spAutoFit/>
+          </a:bodyPr>
+          <a:lstStyle/>
+          <a:p>
+            <a:pPr algn="l"/>
+            <a:r>
+              <a:rPr sz="1200" b="0">
+                <a:solidFill>
+                  <a:srgbClr val="5E5A55"/>
+                </a:solidFill>
+                <a:latin typeface="Calibri"/>
+              </a:rPr>
+              <a:t>4  Choose what to do</a:t>
+            </a:r>
+          </a:p>
+        </p:txBody>
+      </p:sp>
+      <p:sp>
+        <p:nvSpPr>
+          <p:cNvPr id="17" name="Rectangle 16"/>
+          <p:cNvSpPr/>
+          <p:nvPr/>
+        </p:nvSpPr>
+        <p:spPr>
+          <a:xfrm>
+            <a:off x="7360920" y="1417320"/>
+            <a:ext cx="2103120" cy="4572000"/>
+          </a:xfrm>
+          <a:prstGeom prst="rect">
+            <a:avLst/>
+          </a:prstGeom>
+          <a:noFill/>
+          <a:ln w="12700">
+            <a:solidFill>
+              <a:srgbClr val="E6E0D8"/>
+            </a:solidFill>
+          </a:ln>
+        </p:spPr>
+        <p:style>
+          <a:lnRef idx="1">
+            <a:schemeClr val="accent1"/>
+          </a:lnRef>
+          <a:fillRef idx="3">
+            <a:schemeClr val="accent1"/>
+          </a:fillRef>
+          <a:effectRef idx="2">
+            <a:schemeClr val="accent1"/>
+          </a:effectRef>
+          <a:fontRef idx="minor">
+            <a:schemeClr val="lt1"/>
+          </a:fontRef>
+        </p:style>
+        <p:txBody>
+          <a:bodyPr rtlCol="0" anchor="ctr"/>
+          <a:lstStyle/>
+          <a:p>
+            <a:pPr algn="ctr"/>
+          </a:p>
+        </p:txBody>
+      </p:sp>
+      <p:pic>
+        <p:nvPicPr>
+          <p:cNvPr id="18" name="Picture 17" descr="assist_4_track.png"/>
+          <p:cNvPicPr>
+            <a:picLocks noChangeAspect="1"/>
+          </p:cNvPicPr>
+          <p:nvPr/>
+        </p:nvPicPr>
+        <p:blipFill>
+          <a:blip r:embed="rId5"/>
+          <a:srcRect b="6391"/>
+          <a:stretch>
+            <a:fillRect/>
+          </a:stretch>
+        </p:blipFill>
+        <p:spPr>
+          <a:xfrm>
+            <a:off x="7370064" y="1426464"/>
+            <a:ext cx="2084831" cy="4553712"/>
+          </a:xfrm>
+          <a:prstGeom prst="rect">
+            <a:avLst/>
+          </a:prstGeom>
+        </p:spPr>
+      </p:pic>
+      <p:sp>
+        <p:nvSpPr>
+          <p:cNvPr id="19" name="TextBox 18"/>
+          <p:cNvSpPr txBox="1"/>
+          <p:nvPr/>
+        </p:nvSpPr>
+        <p:spPr>
+          <a:xfrm>
+            <a:off x="7360920" y="6053328"/>
+            <a:ext cx="2103120" cy="365760"/>
+          </a:xfrm>
+          <a:prstGeom prst="rect">
+            <a:avLst/>
+          </a:prstGeom>
+          <a:noFill/>
+        </p:spPr>
+        <p:txBody>
+          <a:bodyPr wrap="square">
+            <a:spAutoFit/>
+          </a:bodyPr>
+          <a:lstStyle/>
+          <a:p>
+            <a:pPr algn="l"/>
+            <a:r>
+              <a:rPr sz="1200" b="0">
+                <a:solidFill>
+                  <a:srgbClr val="5E5A55"/>
+                </a:solidFill>
+                <a:latin typeface="Calibri"/>
+              </a:rPr>
+              <a:t>5  Track the recovery</a:t>
+            </a:r>
+          </a:p>
+        </p:txBody>
+      </p:sp>
+      <p:sp>
+        <p:nvSpPr>
+          <p:cNvPr id="20" name="Rectangle 19"/>
+          <p:cNvSpPr/>
+          <p:nvPr/>
+        </p:nvSpPr>
+        <p:spPr>
+          <a:xfrm>
+            <a:off x="9646920" y="1417320"/>
+            <a:ext cx="2103120" cy="4572000"/>
+          </a:xfrm>
+          <a:prstGeom prst="rect">
+            <a:avLst/>
+          </a:prstGeom>
+          <a:noFill/>
+          <a:ln w="12700">
+            <a:solidFill>
+              <a:srgbClr val="E6E0D8"/>
+            </a:solidFill>
+          </a:ln>
+        </p:spPr>
+        <p:style>
+          <a:lnRef idx="1">
+            <a:schemeClr val="accent1"/>
+          </a:lnRef>
+          <a:fillRef idx="3">
+            <a:schemeClr val="accent1"/>
+          </a:fillRef>
+          <a:effectRef idx="2">
+            <a:schemeClr val="accent1"/>
+          </a:effectRef>
+          <a:fontRef idx="minor">
+            <a:schemeClr val="lt1"/>
+          </a:fontRef>
+        </p:style>
+        <p:txBody>
+          <a:bodyPr rtlCol="0" anchor="ctr"/>
+          <a:lstStyle/>
+          <a:p>
+            <a:pPr algn="ctr"/>
+          </a:p>
+        </p:txBody>
+      </p:sp>
+      <p:pic>
+        <p:nvPicPr>
+          <p:cNvPr id="21" name="Picture 20" descr="assist_5_complete.png"/>
+          <p:cNvPicPr>
+            <a:picLocks noChangeAspect="1"/>
+          </p:cNvPicPr>
+          <p:nvPr/>
+        </p:nvPicPr>
+        <p:blipFill>
+          <a:blip r:embed="rId6"/>
+          <a:srcRect b="6391"/>
+          <a:stretch>
+            <a:fillRect/>
+          </a:stretch>
+        </p:blipFill>
+        <p:spPr>
+          <a:xfrm>
+            <a:off x="9656064" y="1426464"/>
+            <a:ext cx="2084831" cy="4553712"/>
+          </a:xfrm>
+          <a:prstGeom prst="rect">
+            <a:avLst/>
+          </a:prstGeom>
+        </p:spPr>
+      </p:pic>
+      <p:sp>
+        <p:nvSpPr>
+          <p:cNvPr id="22" name="TextBox 21"/>
+          <p:cNvSpPr txBox="1"/>
+          <p:nvPr/>
+        </p:nvSpPr>
+        <p:spPr>
+          <a:xfrm>
+            <a:off x="9646920" y="6053328"/>
+            <a:ext cx="2103120" cy="365760"/>
+          </a:xfrm>
+          <a:prstGeom prst="rect">
+            <a:avLst/>
+          </a:prstGeom>
+          <a:noFill/>
+        </p:spPr>
+        <p:txBody>
+          <a:bodyPr wrap="square">
+            <a:spAutoFit/>
+          </a:bodyPr>
+          <a:lstStyle/>
+          <a:p>
+            <a:pPr algn="l"/>
+            <a:r>
+              <a:rPr sz="1200" b="0">
+                <a:solidFill>
+                  <a:srgbClr val="5E5A55"/>
+                </a:solidFill>
+                <a:latin typeface="Calibri"/>
+              </a:rPr>
+              <a:t>6  Complete, with the SAP request</a:t>
+            </a:r>
+          </a:p>
+        </p:txBody>
+      </p:sp>
+    </p:spTree>
+  </p:cSld>
+  <p:clrMapOvr>
+    <a:masterClrMapping/>
+  </p:clrMapOvr>
+</p:sld>
+</file>
+
+<file path=ppt/slides/slide13.xml><?xml version="1.0" encoding="utf-8"?>
 <p:sld xmlns:a="http://schemas.openxmlformats.org/drawingml/2006/main" xmlns:p="http://schemas.openxmlformats.org/presentationml/2006/main" xmlns:r="http://schemas.openxmlformats.org/officeDocument/2006/relationships">
   <p:cSld>
     <p:spTree>
@@ -5083,42 +7066,6 @@
           </a:p>
         </p:txBody>
       </p:sp>
-      <p:sp>
-        <p:nvSpPr>
-          <p:cNvPr id="9" name="TextBox 8"/>
-          <p:cNvSpPr txBox="1"/>
-          <p:nvPr/>
-        </p:nvSpPr>
-        <p:spPr>
-          <a:xfrm>
-            <a:off x="365760" y="4709160"/>
-            <a:ext cx="11430000" cy="1554480"/>
-          </a:xfrm>
-          <a:prstGeom prst="rect">
-            <a:avLst/>
-          </a:prstGeom>
-          <a:noFill/>
-        </p:spPr>
-        <p:txBody>
-          <a:bodyPr wrap="square">
-            <a:spAutoFit/>
-          </a:bodyPr>
-          <a:lstStyle/>
-          <a:p>
-            <a:pPr algn="l"/>
-            <a:r>
-              <a:rPr sz="1400" b="0">
-                <a:solidFill>
-                  <a:srgbClr val="5E5A55"/>
-                </a:solidFill>
-                <a:latin typeface="Calibri"/>
-              </a:rPr>
-              <a:t>The 34 / 33 / 33 split is an equal contribution with one percent for rounding. Confirm it with the group before submission. Replace the comment text if the group agrees a different split.
-Helix delivery names on the business-case slides are unchanged: Dingchen Yuan, Taariq Mohamed, Huy Nguyen.</a:t>
-            </a:r>
-          </a:p>
-        </p:txBody>
-      </p:sp>
     </p:spTree>
   </p:cSld>
   <p:clrMapOvr>
@@ -5288,7 +7235,7 @@
                 </a:solidFill>
                 <a:latin typeface="Calibri"/>
               </a:rPr>
-              <a:t>2  /  10</a:t>
+              <a:t>2  /  12</a:t>
             </a:r>
           </a:p>
         </p:txBody>
@@ -5872,7 +7819,7 @@
                 </a:solidFill>
                 <a:latin typeface="Calibri"/>
               </a:rPr>
-              <a:t>3  /  10</a:t>
+              <a:t>3  /  12</a:t>
             </a:r>
           </a:p>
         </p:txBody>
@@ -6327,7 +8274,7 @@
                 </a:solidFill>
                 <a:latin typeface="Calibri"/>
               </a:rPr>
-              <a:t>4  /  10</a:t>
+              <a:t>4  /  12</a:t>
             </a:r>
           </a:p>
         </p:txBody>
@@ -7291,7 +9238,7 @@
                 </a:solidFill>
                 <a:latin typeface="Calibri"/>
               </a:rPr>
-              <a:t>5  /  10</a:t>
+              <a:t>5  /  12</a:t>
             </a:r>
           </a:p>
         </p:txBody>
@@ -7995,7 +9942,7 @@
                 </a:solidFill>
                 <a:latin typeface="Calibri"/>
               </a:rPr>
-              <a:t>6  /  10</a:t>
+              <a:t>6  /  12</a:t>
             </a:r>
           </a:p>
         </p:txBody>
@@ -8707,7 +10654,7 @@
                 </a:solidFill>
                 <a:latin typeface="Calibri"/>
               </a:rPr>
-              <a:t>7  /  10</a:t>
+              <a:t>7  /  12</a:t>
             </a:r>
           </a:p>
         </p:txBody>
@@ -9515,7 +11462,7 @@
             <a:avLst/>
           </a:prstGeom>
           <a:solidFill>
-            <a:srgbClr val="1C1B1A"/>
+            <a:srgbClr val="FFFFFF"/>
           </a:solidFill>
           <a:ln>
             <a:noFill/>
@@ -9552,7 +11499,7 @@
         <p:spPr>
           <a:xfrm>
             <a:off x="0" y="0"/>
-            <a:ext cx="164592" cy="6858000"/>
+            <a:ext cx="12191695" cy="73152"/>
           </a:xfrm>
           <a:prstGeom prst="rect">
             <a:avLst/>
@@ -9594,8 +11541,78 @@
         </p:nvSpPr>
         <p:spPr>
           <a:xfrm>
-            <a:off x="777240" y="411480"/>
-            <a:ext cx="5486400" cy="274320"/>
+            <a:off x="502920" y="6510528"/>
+            <a:ext cx="7315200" cy="256032"/>
+          </a:xfrm>
+          <a:prstGeom prst="rect">
+            <a:avLst/>
+          </a:prstGeom>
+          <a:noFill/>
+        </p:spPr>
+        <p:txBody>
+          <a:bodyPr wrap="square">
+            <a:spAutoFit/>
+          </a:bodyPr>
+          <a:lstStyle/>
+          <a:p>
+            <a:pPr algn="l"/>
+            <a:r>
+              <a:rPr sz="1200" b="0">
+                <a:solidFill>
+                  <a:srgbClr val="5E5A55"/>
+                </a:solidFill>
+                <a:latin typeface="Calibri"/>
+              </a:rPr>
+              <a:t>Kmart Delivery Assist  ·  Managing Director</a:t>
+            </a:r>
+          </a:p>
+        </p:txBody>
+      </p:sp>
+      <p:sp>
+        <p:nvSpPr>
+          <p:cNvPr id="5" name="TextBox 4"/>
+          <p:cNvSpPr txBox="1"/>
+          <p:nvPr/>
+        </p:nvSpPr>
+        <p:spPr>
+          <a:xfrm>
+            <a:off x="9509760" y="6510528"/>
+            <a:ext cx="2194560" cy="256032"/>
+          </a:xfrm>
+          <a:prstGeom prst="rect">
+            <a:avLst/>
+          </a:prstGeom>
+          <a:noFill/>
+        </p:spPr>
+        <p:txBody>
+          <a:bodyPr wrap="square">
+            <a:spAutoFit/>
+          </a:bodyPr>
+          <a:lstStyle/>
+          <a:p>
+            <a:pPr algn="r"/>
+            <a:r>
+              <a:rPr sz="1200" b="0">
+                <a:solidFill>
+                  <a:srgbClr val="5E5A55"/>
+                </a:solidFill>
+                <a:latin typeface="Calibri"/>
+              </a:rPr>
+              <a:t>8  /  12</a:t>
+            </a:r>
+          </a:p>
+        </p:txBody>
+      </p:sp>
+      <p:sp>
+        <p:nvSpPr>
+          <p:cNvPr id="6" name="TextBox 5"/>
+          <p:cNvSpPr txBox="1"/>
+          <p:nvPr/>
+        </p:nvSpPr>
+        <p:spPr>
+          <a:xfrm>
+            <a:off x="502920" y="320040"/>
+            <a:ext cx="7315200" cy="274320"/>
           </a:xfrm>
           <a:prstGeom prst="rect">
             <a:avLst/>
@@ -9616,77 +11633,7 @@
                 </a:solidFill>
                 <a:latin typeface="Calibri"/>
               </a:rPr>
-              <a:t>SHOW IT</a:t>
-            </a:r>
-          </a:p>
-        </p:txBody>
-      </p:sp>
-      <p:sp>
-        <p:nvSpPr>
-          <p:cNvPr id="5" name="TextBox 4"/>
-          <p:cNvSpPr txBox="1"/>
-          <p:nvPr/>
-        </p:nvSpPr>
-        <p:spPr>
-          <a:xfrm>
-            <a:off x="777240" y="914400"/>
-            <a:ext cx="10058400" cy="731520"/>
-          </a:xfrm>
-          <a:prstGeom prst="rect">
-            <a:avLst/>
-          </a:prstGeom>
-          <a:noFill/>
-        </p:spPr>
-        <p:txBody>
-          <a:bodyPr wrap="square">
-            <a:spAutoFit/>
-          </a:bodyPr>
-          <a:lstStyle/>
-          <a:p>
-            <a:pPr algn="l"/>
-            <a:r>
-              <a:rPr sz="4800" b="1">
-                <a:solidFill>
-                  <a:srgbClr val="FFFFFF"/>
-                </a:solidFill>
-                <a:latin typeface="Calibri"/>
-              </a:rPr>
-              <a:t>Order KM185002</a:t>
-            </a:r>
-          </a:p>
-        </p:txBody>
-      </p:sp>
-      <p:sp>
-        <p:nvSpPr>
-          <p:cNvPr id="6" name="TextBox 5"/>
-          <p:cNvSpPr txBox="1"/>
-          <p:nvPr/>
-        </p:nvSpPr>
-        <p:spPr>
-          <a:xfrm>
-            <a:off x="777240" y="1828800"/>
-            <a:ext cx="9144000" cy="457200"/>
-          </a:xfrm>
-          <a:prstGeom prst="rect">
-            <a:avLst/>
-          </a:prstGeom>
-          <a:noFill/>
-        </p:spPr>
-        <p:txBody>
-          <a:bodyPr wrap="square">
-            <a:spAutoFit/>
-          </a:bodyPr>
-          <a:lstStyle/>
-          <a:p>
-            <a:pPr algn="l"/>
-            <a:r>
-              <a:rPr sz="2000" b="0">
-                <a:solidFill>
-                  <a:srgbClr val="E6E0D8"/>
-                </a:solidFill>
-                <a:latin typeface="Calibri"/>
-              </a:rPr>
-              <a:t>ANKO Storage Box 30L  ·  damaged on delivery  ·  cushion is fine</a:t>
+              <a:t>UNDER THE HOOD  ·  SAP</a:t>
             </a:r>
           </a:p>
         </p:txBody>
@@ -9699,100 +11646,116 @@
         </p:nvSpPr>
         <p:spPr>
           <a:xfrm>
-            <a:off x="777240" y="2834640"/>
-            <a:ext cx="10058400" cy="502920"/>
-          </a:xfrm>
-          <a:prstGeom prst="rect">
-            <a:avLst/>
-          </a:prstGeom>
-          <a:noFill/>
-        </p:spPr>
-        <p:txBody>
-          <a:bodyPr wrap="square">
-            <a:spAutoFit/>
-          </a:bodyPr>
-          <a:lstStyle/>
-          <a:p>
-            <a:pPr algn="l"/>
-            <a:r>
-              <a:rPr sz="2200" b="0">
-                <a:solidFill>
-                  <a:srgbClr val="FFFFFF"/>
-                </a:solidFill>
-                <a:latin typeface="Calibri"/>
-              </a:rPr>
-              <a:t>1    Open the order. Read the one-sentence status.</a:t>
-            </a:r>
-          </a:p>
-        </p:txBody>
-      </p:sp>
-      <p:sp>
-        <p:nvSpPr>
-          <p:cNvPr id="8" name="TextBox 7"/>
-          <p:cNvSpPr txBox="1"/>
-          <p:nvPr/>
-        </p:nvSpPr>
-        <p:spPr>
-          <a:xfrm>
-            <a:off x="777240" y="3474720"/>
-            <a:ext cx="10058400" cy="502920"/>
-          </a:xfrm>
-          <a:prstGeom prst="rect">
-            <a:avLst/>
-          </a:prstGeom>
-          <a:noFill/>
-        </p:spPr>
-        <p:txBody>
-          <a:bodyPr wrap="square">
-            <a:spAutoFit/>
-          </a:bodyPr>
-          <a:lstStyle/>
-          <a:p>
-            <a:pPr algn="l"/>
-            <a:r>
-              <a:rPr sz="2200" b="0">
-                <a:solidFill>
-                  <a:srgbClr val="FFFFFF"/>
-                </a:solidFill>
-                <a:latin typeface="Calibri"/>
-              </a:rPr>
-              <a:t>2    Confirm the problem. Keep the recommended replacement.</a:t>
-            </a:r>
-          </a:p>
-        </p:txBody>
-      </p:sp>
-      <p:sp>
-        <p:nvSpPr>
-          <p:cNvPr id="9" name="TextBox 8"/>
-          <p:cNvSpPr txBox="1"/>
-          <p:nvPr/>
-        </p:nvSpPr>
-        <p:spPr>
-          <a:xfrm>
-            <a:off x="777240" y="4114800"/>
-            <a:ext cx="10058400" cy="502920"/>
-          </a:xfrm>
-          <a:prstGeom prst="rect">
-            <a:avLst/>
-          </a:prstGeom>
-          <a:noFill/>
-        </p:spPr>
-        <p:txBody>
-          <a:bodyPr wrap="square">
-            <a:spAutoFit/>
-          </a:bodyPr>
-          <a:lstStyle/>
-          <a:p>
-            <a:pPr algn="l"/>
-            <a:r>
-              <a:rPr sz="2200" b="0">
-                <a:solidFill>
-                  <a:srgbClr val="FFFFFF"/>
-                </a:solidFill>
-                <a:latin typeface="Calibri"/>
-              </a:rPr>
-              <a:t>3    Check for an update until the case is ready.</a:t>
-            </a:r>
+            <a:off x="502920" y="640080"/>
+            <a:ext cx="10972800" cy="548640"/>
+          </a:xfrm>
+          <a:prstGeom prst="rect">
+            <a:avLst/>
+          </a:prstGeom>
+          <a:noFill/>
+        </p:spPr>
+        <p:txBody>
+          <a:bodyPr wrap="square">
+            <a:spAutoFit/>
+          </a:bodyPr>
+          <a:lstStyle/>
+          <a:p>
+            <a:pPr algn="l"/>
+            <a:r>
+              <a:rPr sz="2800" b="1">
+                <a:solidFill>
+                  <a:srgbClr val="1C1B1A"/>
+                </a:solidFill>
+                <a:latin typeface="Calibri"/>
+              </a:rPr>
+              <a:t>Real SAP data in. Exact SAP requests out.</a:t>
+            </a:r>
+          </a:p>
+        </p:txBody>
+      </p:sp>
+      <p:sp>
+        <p:nvSpPr>
+          <p:cNvPr id="8" name="Rectangle 7"/>
+          <p:cNvSpPr/>
+          <p:nvPr/>
+        </p:nvSpPr>
+        <p:spPr>
+          <a:xfrm>
+            <a:off x="502920" y="1554480"/>
+            <a:ext cx="3566160" cy="4526280"/>
+          </a:xfrm>
+          <a:prstGeom prst="rect">
+            <a:avLst/>
+          </a:prstGeom>
+          <a:solidFill>
+            <a:srgbClr val="F6F3EF"/>
+          </a:solidFill>
+          <a:ln>
+            <a:noFill/>
+          </a:ln>
+        </p:spPr>
+        <p:style>
+          <a:lnRef idx="1">
+            <a:schemeClr val="accent1"/>
+          </a:lnRef>
+          <a:fillRef idx="3">
+            <a:schemeClr val="accent1"/>
+          </a:fillRef>
+          <a:effectRef idx="2">
+            <a:schemeClr val="accent1"/>
+          </a:effectRef>
+          <a:fontRef idx="minor">
+            <a:schemeClr val="lt1"/>
+          </a:fontRef>
+        </p:style>
+        <p:txBody>
+          <a:bodyPr rtlCol="0" anchor="ctr"/>
+          <a:lstStyle/>
+          <a:p>
+            <a:pPr algn="ctr"/>
+          </a:p>
+        </p:txBody>
+      </p:sp>
+      <p:sp>
+        <p:nvSpPr>
+          <p:cNvPr id="9" name="Rectangle 8"/>
+          <p:cNvSpPr/>
+          <p:nvPr/>
+        </p:nvSpPr>
+        <p:spPr>
+          <a:xfrm>
+            <a:off x="502920" y="1554480"/>
+            <a:ext cx="3566160" cy="73152"/>
+          </a:xfrm>
+          <a:prstGeom prst="rect">
+            <a:avLst/>
+          </a:prstGeom>
+          <a:solidFill>
+            <a:srgbClr val="E10600"/>
+          </a:solidFill>
+          <a:ln>
+            <a:noFill/>
+          </a:ln>
+        </p:spPr>
+        <p:style>
+          <a:lnRef idx="1">
+            <a:schemeClr val="accent1"/>
+          </a:lnRef>
+          <a:fillRef idx="3">
+            <a:schemeClr val="accent1"/>
+          </a:fillRef>
+          <a:effectRef idx="2">
+            <a:schemeClr val="accent1"/>
+          </a:effectRef>
+          <a:fontRef idx="minor">
+            <a:schemeClr val="lt1"/>
+          </a:fontRef>
+        </p:style>
+        <p:txBody>
+          <a:bodyPr rtlCol="0" anchor="ctr"/>
+          <a:lstStyle/>
+          <a:p>
+            <a:pPr algn="ctr"/>
           </a:p>
         </p:txBody>
       </p:sp>
@@ -9804,29 +11767,385 @@
         </p:nvSpPr>
         <p:spPr>
           <a:xfrm>
-            <a:off x="777240" y="4754879"/>
-            <a:ext cx="10058400" cy="502920"/>
-          </a:xfrm>
-          <a:prstGeom prst="rect">
-            <a:avLst/>
-          </a:prstGeom>
-          <a:noFill/>
-        </p:spPr>
-        <p:txBody>
-          <a:bodyPr wrap="square">
-            <a:spAutoFit/>
-          </a:bodyPr>
-          <a:lstStyle/>
-          <a:p>
-            <a:pPr algn="l"/>
-            <a:r>
-              <a:rPr sz="2200" b="0">
-                <a:solidFill>
-                  <a:srgbClr val="FFFFFF"/>
-                </a:solidFill>
-                <a:latin typeface="Calibri"/>
-              </a:rPr>
-              <a:t>4    Confirm. Show the SAP service request.</a:t>
+            <a:off x="731520" y="1783080"/>
+            <a:ext cx="3108960" cy="365760"/>
+          </a:xfrm>
+          <a:prstGeom prst="rect">
+            <a:avLst/>
+          </a:prstGeom>
+          <a:noFill/>
+        </p:spPr>
+        <p:txBody>
+          <a:bodyPr wrap="square">
+            <a:spAutoFit/>
+          </a:bodyPr>
+          <a:lstStyle/>
+          <a:p>
+            <a:pPr algn="l"/>
+            <a:r>
+              <a:rPr sz="1400" b="1">
+                <a:solidFill>
+                  <a:srgbClr val="E10600"/>
+                </a:solidFill>
+                <a:latin typeface="Calibri"/>
+              </a:rPr>
+              <a:t>READ LIVE</a:t>
+            </a:r>
+          </a:p>
+        </p:txBody>
+      </p:sp>
+      <p:sp>
+        <p:nvSpPr>
+          <p:cNvPr id="11" name="TextBox 10"/>
+          <p:cNvSpPr txBox="1"/>
+          <p:nvPr/>
+        </p:nvSpPr>
+        <p:spPr>
+          <a:xfrm>
+            <a:off x="731520" y="2240280"/>
+            <a:ext cx="3200400" cy="3657600"/>
+          </a:xfrm>
+          <a:prstGeom prst="rect">
+            <a:avLst/>
+          </a:prstGeom>
+          <a:noFill/>
+        </p:spPr>
+        <p:txBody>
+          <a:bodyPr wrap="square">
+            <a:spAutoFit/>
+          </a:bodyPr>
+          <a:lstStyle/>
+          <a:p>
+            <a:pPr algn="l"/>
+            <a:r>
+              <a:rPr sz="1400" b="0">
+                <a:solidFill>
+                  <a:srgbClr val="1C1B1A"/>
+                </a:solidFill>
+                <a:latin typeface="Calibri"/>
+              </a:rPr>
+              <a:t>Sales Order API
+API_SALES_ORDER_SRV
+Order, items and delivery status ($top, $select, $expand).
+Purchase Order API (OData V4)
+Supplier orders, items, schedule-line dates.</a:t>
+            </a:r>
+          </a:p>
+        </p:txBody>
+      </p:sp>
+      <p:sp>
+        <p:nvSpPr>
+          <p:cNvPr id="12" name="Rectangle 11"/>
+          <p:cNvSpPr/>
+          <p:nvPr/>
+        </p:nvSpPr>
+        <p:spPr>
+          <a:xfrm>
+            <a:off x="4297680" y="1554480"/>
+            <a:ext cx="3566160" cy="4526280"/>
+          </a:xfrm>
+          <a:prstGeom prst="rect">
+            <a:avLst/>
+          </a:prstGeom>
+          <a:solidFill>
+            <a:srgbClr val="F6F3EF"/>
+          </a:solidFill>
+          <a:ln>
+            <a:noFill/>
+          </a:ln>
+        </p:spPr>
+        <p:style>
+          <a:lnRef idx="1">
+            <a:schemeClr val="accent1"/>
+          </a:lnRef>
+          <a:fillRef idx="3">
+            <a:schemeClr val="accent1"/>
+          </a:fillRef>
+          <a:effectRef idx="2">
+            <a:schemeClr val="accent1"/>
+          </a:effectRef>
+          <a:fontRef idx="minor">
+            <a:schemeClr val="lt1"/>
+          </a:fontRef>
+        </p:style>
+        <p:txBody>
+          <a:bodyPr rtlCol="0" anchor="ctr"/>
+          <a:lstStyle/>
+          <a:p>
+            <a:pPr algn="ctr"/>
+          </a:p>
+        </p:txBody>
+      </p:sp>
+      <p:sp>
+        <p:nvSpPr>
+          <p:cNvPr id="13" name="Rectangle 12"/>
+          <p:cNvSpPr/>
+          <p:nvPr/>
+        </p:nvSpPr>
+        <p:spPr>
+          <a:xfrm>
+            <a:off x="4297680" y="1554480"/>
+            <a:ext cx="3566160" cy="73152"/>
+          </a:xfrm>
+          <a:prstGeom prst="rect">
+            <a:avLst/>
+          </a:prstGeom>
+          <a:solidFill>
+            <a:srgbClr val="1C1B1A"/>
+          </a:solidFill>
+          <a:ln>
+            <a:noFill/>
+          </a:ln>
+        </p:spPr>
+        <p:style>
+          <a:lnRef idx="1">
+            <a:schemeClr val="accent1"/>
+          </a:lnRef>
+          <a:fillRef idx="3">
+            <a:schemeClr val="accent1"/>
+          </a:fillRef>
+          <a:effectRef idx="2">
+            <a:schemeClr val="accent1"/>
+          </a:effectRef>
+          <a:fontRef idx="minor">
+            <a:schemeClr val="lt1"/>
+          </a:fontRef>
+        </p:style>
+        <p:txBody>
+          <a:bodyPr rtlCol="0" anchor="ctr"/>
+          <a:lstStyle/>
+          <a:p>
+            <a:pPr algn="ctr"/>
+          </a:p>
+        </p:txBody>
+      </p:sp>
+      <p:sp>
+        <p:nvSpPr>
+          <p:cNvPr id="14" name="TextBox 13"/>
+          <p:cNvSpPr txBox="1"/>
+          <p:nvPr/>
+        </p:nvSpPr>
+        <p:spPr>
+          <a:xfrm>
+            <a:off x="4526280" y="1783080"/>
+            <a:ext cx="3108960" cy="365760"/>
+          </a:xfrm>
+          <a:prstGeom prst="rect">
+            <a:avLst/>
+          </a:prstGeom>
+          <a:noFill/>
+        </p:spPr>
+        <p:txBody>
+          <a:bodyPr wrap="square">
+            <a:spAutoFit/>
+          </a:bodyPr>
+          <a:lstStyle/>
+          <a:p>
+            <a:pPr algn="l"/>
+            <a:r>
+              <a:rPr sz="1400" b="1">
+                <a:solidFill>
+                  <a:srgbClr val="1C1B1A"/>
+                </a:solidFill>
+                <a:latin typeface="Calibri"/>
+              </a:rPr>
+              <a:t>WRITE  ·  SIMULATED</a:t>
+            </a:r>
+          </a:p>
+        </p:txBody>
+      </p:sp>
+      <p:sp>
+        <p:nvSpPr>
+          <p:cNvPr id="15" name="TextBox 14"/>
+          <p:cNvSpPr txBox="1"/>
+          <p:nvPr/>
+        </p:nvSpPr>
+        <p:spPr>
+          <a:xfrm>
+            <a:off x="4526280" y="2240280"/>
+            <a:ext cx="3200400" cy="3657600"/>
+          </a:xfrm>
+          <a:prstGeom prst="rect">
+            <a:avLst/>
+          </a:prstGeom>
+          <a:noFill/>
+        </p:spPr>
+        <p:txBody>
+          <a:bodyPr wrap="square">
+            <a:spAutoFit/>
+          </a:bodyPr>
+          <a:lstStyle/>
+          <a:p>
+            <a:pPr algn="l"/>
+            <a:r>
+              <a:rPr sz="1400" b="0">
+                <a:solidFill>
+                  <a:srgbClr val="1C1B1A"/>
+                </a:solidFill>
+                <a:latin typeface="Calibri"/>
+              </a:rPr>
+              <a:t>Service request
+OP_API_SERVICE_REQUEST_SRV_0001
+Purchase-order items, schedule lines, notes.
+The sandbox is read-only (POST returns 405), so each request is built in exact OData format, saved and shown on screen. One setting switches to live S/4HANA.</a:t>
+            </a:r>
+          </a:p>
+        </p:txBody>
+      </p:sp>
+      <p:sp>
+        <p:nvSpPr>
+          <p:cNvPr id="16" name="Rectangle 15"/>
+          <p:cNvSpPr/>
+          <p:nvPr/>
+        </p:nvSpPr>
+        <p:spPr>
+          <a:xfrm>
+            <a:off x="8092440" y="1554480"/>
+            <a:ext cx="3566160" cy="4526280"/>
+          </a:xfrm>
+          <a:prstGeom prst="rect">
+            <a:avLst/>
+          </a:prstGeom>
+          <a:solidFill>
+            <a:srgbClr val="F6F3EF"/>
+          </a:solidFill>
+          <a:ln>
+            <a:noFill/>
+          </a:ln>
+        </p:spPr>
+        <p:style>
+          <a:lnRef idx="1">
+            <a:schemeClr val="accent1"/>
+          </a:lnRef>
+          <a:fillRef idx="3">
+            <a:schemeClr val="accent1"/>
+          </a:fillRef>
+          <a:effectRef idx="2">
+            <a:schemeClr val="accent1"/>
+          </a:effectRef>
+          <a:fontRef idx="minor">
+            <a:schemeClr val="lt1"/>
+          </a:fontRef>
+        </p:style>
+        <p:txBody>
+          <a:bodyPr rtlCol="0" anchor="ctr"/>
+          <a:lstStyle/>
+          <a:p>
+            <a:pPr algn="ctr"/>
+          </a:p>
+        </p:txBody>
+      </p:sp>
+      <p:sp>
+        <p:nvSpPr>
+          <p:cNvPr id="17" name="Rectangle 16"/>
+          <p:cNvSpPr/>
+          <p:nvPr/>
+        </p:nvSpPr>
+        <p:spPr>
+          <a:xfrm>
+            <a:off x="8092440" y="1554480"/>
+            <a:ext cx="3566160" cy="73152"/>
+          </a:xfrm>
+          <a:prstGeom prst="rect">
+            <a:avLst/>
+          </a:prstGeom>
+          <a:solidFill>
+            <a:srgbClr val="1C1B1A"/>
+          </a:solidFill>
+          <a:ln>
+            <a:noFill/>
+          </a:ln>
+        </p:spPr>
+        <p:style>
+          <a:lnRef idx="1">
+            <a:schemeClr val="accent1"/>
+          </a:lnRef>
+          <a:fillRef idx="3">
+            <a:schemeClr val="accent1"/>
+          </a:fillRef>
+          <a:effectRef idx="2">
+            <a:schemeClr val="accent1"/>
+          </a:effectRef>
+          <a:fontRef idx="minor">
+            <a:schemeClr val="lt1"/>
+          </a:fontRef>
+        </p:style>
+        <p:txBody>
+          <a:bodyPr rtlCol="0" anchor="ctr"/>
+          <a:lstStyle/>
+          <a:p>
+            <a:pPr algn="ctr"/>
+          </a:p>
+        </p:txBody>
+      </p:sp>
+      <p:sp>
+        <p:nvSpPr>
+          <p:cNvPr id="18" name="TextBox 17"/>
+          <p:cNvSpPr txBox="1"/>
+          <p:nvPr/>
+        </p:nvSpPr>
+        <p:spPr>
+          <a:xfrm>
+            <a:off x="8321040" y="1783080"/>
+            <a:ext cx="3108960" cy="365760"/>
+          </a:xfrm>
+          <a:prstGeom prst="rect">
+            <a:avLst/>
+          </a:prstGeom>
+          <a:noFill/>
+        </p:spPr>
+        <p:txBody>
+          <a:bodyPr wrap="square">
+            <a:spAutoFit/>
+          </a:bodyPr>
+          <a:lstStyle/>
+          <a:p>
+            <a:pPr algn="l"/>
+            <a:r>
+              <a:rPr sz="1400" b="1">
+                <a:solidFill>
+                  <a:srgbClr val="1C1B1A"/>
+                </a:solidFill>
+                <a:latin typeface="Calibri"/>
+              </a:rPr>
+              <a:t>BUILT THE LAB WAY</a:t>
+            </a:r>
+          </a:p>
+        </p:txBody>
+      </p:sp>
+      <p:sp>
+        <p:nvSpPr>
+          <p:cNvPr id="19" name="TextBox 18"/>
+          <p:cNvSpPr txBox="1"/>
+          <p:nvPr/>
+        </p:nvSpPr>
+        <p:spPr>
+          <a:xfrm>
+            <a:off x="8321040" y="2240280"/>
+            <a:ext cx="3200400" cy="3657600"/>
+          </a:xfrm>
+          <a:prstGeom prst="rect">
+            <a:avLst/>
+          </a:prstGeom>
+          <a:noFill/>
+        </p:spPr>
+        <p:txBody>
+          <a:bodyPr wrap="square">
+            <a:spAutoFit/>
+          </a:bodyPr>
+          <a:lstStyle/>
+          <a:p>
+            <a:pPr algn="l"/>
+            <a:r>
+              <a:rPr sz="1400" b="0">
+                <a:solidFill>
+                  <a:srgbClr val="1C1B1A"/>
+                </a:solidFill>
+                <a:latin typeface="Calibri"/>
+              </a:rPr>
+              <a:t>SAP Integration Suite: API proxy and MCP server deployed.
+OpenCode prompts with the API spec, sandbox URL and API key.
+If the sandbox is down, the app falls back to the last saved SAP snapshot.</a:t>
             </a:r>
           </a:p>
         </p:txBody>
@@ -9864,7 +12183,7 @@
             <a:avLst/>
           </a:prstGeom>
           <a:solidFill>
-            <a:srgbClr val="FFFFFF"/>
+            <a:srgbClr val="1C1B1A"/>
           </a:solidFill>
           <a:ln>
             <a:noFill/>
@@ -9901,7 +12220,7 @@
         <p:spPr>
           <a:xfrm>
             <a:off x="0" y="0"/>
-            <a:ext cx="12191695" cy="73152"/>
+            <a:ext cx="164592" cy="6858000"/>
           </a:xfrm>
           <a:prstGeom prst="rect">
             <a:avLst/>
@@ -9943,29 +12262,29 @@
         </p:nvSpPr>
         <p:spPr>
           <a:xfrm>
-            <a:off x="502920" y="6510528"/>
-            <a:ext cx="7315200" cy="256032"/>
-          </a:xfrm>
-          <a:prstGeom prst="rect">
-            <a:avLst/>
-          </a:prstGeom>
-          <a:noFill/>
-        </p:spPr>
-        <p:txBody>
-          <a:bodyPr wrap="square">
-            <a:spAutoFit/>
-          </a:bodyPr>
-          <a:lstStyle/>
-          <a:p>
-            <a:pPr algn="l"/>
-            <a:r>
-              <a:rPr sz="1200" b="0">
-                <a:solidFill>
-                  <a:srgbClr val="5E5A55"/>
-                </a:solidFill>
-                <a:latin typeface="Calibri"/>
-              </a:rPr>
-              <a:t>Kmart Delivery Assist  ·  Managing Director</a:t>
+            <a:off x="777240" y="411480"/>
+            <a:ext cx="5486400" cy="274320"/>
+          </a:xfrm>
+          <a:prstGeom prst="rect">
+            <a:avLst/>
+          </a:prstGeom>
+          <a:noFill/>
+        </p:spPr>
+        <p:txBody>
+          <a:bodyPr wrap="square">
+            <a:spAutoFit/>
+          </a:bodyPr>
+          <a:lstStyle/>
+          <a:p>
+            <a:pPr algn="l"/>
+            <a:r>
+              <a:rPr sz="1400" b="1">
+                <a:solidFill>
+                  <a:srgbClr val="E10600"/>
+                </a:solidFill>
+                <a:latin typeface="Calibri"/>
+              </a:rPr>
+              <a:t>SHOW IT</a:t>
             </a:r>
           </a:p>
         </p:txBody>
@@ -9978,29 +12297,29 @@
         </p:nvSpPr>
         <p:spPr>
           <a:xfrm>
-            <a:off x="9509760" y="6510528"/>
-            <a:ext cx="2194560" cy="256032"/>
-          </a:xfrm>
-          <a:prstGeom prst="rect">
-            <a:avLst/>
-          </a:prstGeom>
-          <a:noFill/>
-        </p:spPr>
-        <p:txBody>
-          <a:bodyPr wrap="square">
-            <a:spAutoFit/>
-          </a:bodyPr>
-          <a:lstStyle/>
-          <a:p>
-            <a:pPr algn="r"/>
-            <a:r>
-              <a:rPr sz="1200" b="0">
-                <a:solidFill>
-                  <a:srgbClr val="5E5A55"/>
-                </a:solidFill>
-                <a:latin typeface="Calibri"/>
-              </a:rPr>
-              <a:t>9  /  10</a:t>
+            <a:off x="777240" y="914400"/>
+            <a:ext cx="10058400" cy="731520"/>
+          </a:xfrm>
+          <a:prstGeom prst="rect">
+            <a:avLst/>
+          </a:prstGeom>
+          <a:noFill/>
+        </p:spPr>
+        <p:txBody>
+          <a:bodyPr wrap="square">
+            <a:spAutoFit/>
+          </a:bodyPr>
+          <a:lstStyle/>
+          <a:p>
+            <a:pPr algn="l"/>
+            <a:r>
+              <a:rPr sz="4800" b="1">
+                <a:solidFill>
+                  <a:srgbClr val="FFFFFF"/>
+                </a:solidFill>
+                <a:latin typeface="Calibri"/>
+              </a:rPr>
+              <a:t>Order KM185002</a:t>
             </a:r>
           </a:p>
         </p:txBody>
@@ -10013,29 +12332,29 @@
         </p:nvSpPr>
         <p:spPr>
           <a:xfrm>
-            <a:off x="502920" y="320040"/>
-            <a:ext cx="3657600" cy="274320"/>
-          </a:xfrm>
-          <a:prstGeom prst="rect">
-            <a:avLst/>
-          </a:prstGeom>
-          <a:noFill/>
-        </p:spPr>
-        <p:txBody>
-          <a:bodyPr wrap="square">
-            <a:spAutoFit/>
-          </a:bodyPr>
-          <a:lstStyle/>
-          <a:p>
-            <a:pPr algn="l"/>
-            <a:r>
-              <a:rPr sz="1400" b="1">
-                <a:solidFill>
-                  <a:srgbClr val="E10600"/>
-                </a:solidFill>
-                <a:latin typeface="Calibri"/>
-              </a:rPr>
-              <a:t>THE ASK</a:t>
+            <a:off x="777240" y="1828800"/>
+            <a:ext cx="9144000" cy="457200"/>
+          </a:xfrm>
+          <a:prstGeom prst="rect">
+            <a:avLst/>
+          </a:prstGeom>
+          <a:noFill/>
+        </p:spPr>
+        <p:txBody>
+          <a:bodyPr wrap="square">
+            <a:spAutoFit/>
+          </a:bodyPr>
+          <a:lstStyle/>
+          <a:p>
+            <a:pPr algn="l"/>
+            <a:r>
+              <a:rPr sz="2000" b="0">
+                <a:solidFill>
+                  <a:srgbClr val="E6E0D8"/>
+                </a:solidFill>
+                <a:latin typeface="Calibri"/>
+              </a:rPr>
+              <a:t>ANKO Storage Box 30L  ·  damaged on delivery  ·  cushion is fine</a:t>
             </a:r>
           </a:p>
         </p:txBody>
@@ -10048,30 +12367,29 @@
         </p:nvSpPr>
         <p:spPr>
           <a:xfrm>
-            <a:off x="502920" y="731520"/>
-            <a:ext cx="10972800" cy="1097280"/>
-          </a:xfrm>
-          <a:prstGeom prst="rect">
-            <a:avLst/>
-          </a:prstGeom>
-          <a:noFill/>
-        </p:spPr>
-        <p:txBody>
-          <a:bodyPr wrap="square">
-            <a:spAutoFit/>
-          </a:bodyPr>
-          <a:lstStyle/>
-          <a:p>
-            <a:pPr algn="l"/>
-            <a:r>
-              <a:rPr sz="3400" b="1">
-                <a:solidFill>
-                  <a:srgbClr val="1C1B1A"/>
-                </a:solidFill>
-                <a:latin typeface="Calibri"/>
-              </a:rPr>
-              <a:t>Use this as the customer face
-of exception recovery.</a:t>
+            <a:off x="777240" y="2834640"/>
+            <a:ext cx="10058400" cy="502920"/>
+          </a:xfrm>
+          <a:prstGeom prst="rect">
+            <a:avLst/>
+          </a:prstGeom>
+          <a:noFill/>
+        </p:spPr>
+        <p:txBody>
+          <a:bodyPr wrap="square">
+            <a:spAutoFit/>
+          </a:bodyPr>
+          <a:lstStyle/>
+          <a:p>
+            <a:pPr algn="l"/>
+            <a:r>
+              <a:rPr sz="2200" b="0">
+                <a:solidFill>
+                  <a:srgbClr val="FFFFFF"/>
+                </a:solidFill>
+                <a:latin typeface="Calibri"/>
+              </a:rPr>
+              <a:t>1    Open the order. Read the one-sentence status.</a:t>
             </a:r>
           </a:p>
         </p:txBody>
@@ -10084,29 +12402,29 @@
         </p:nvSpPr>
         <p:spPr>
           <a:xfrm>
-            <a:off x="502920" y="2468880"/>
-            <a:ext cx="2194560" cy="640080"/>
-          </a:xfrm>
-          <a:prstGeom prst="rect">
-            <a:avLst/>
-          </a:prstGeom>
-          <a:noFill/>
-        </p:spPr>
-        <p:txBody>
-          <a:bodyPr wrap="square">
-            <a:spAutoFit/>
-          </a:bodyPr>
-          <a:lstStyle/>
-          <a:p>
-            <a:pPr algn="l"/>
-            <a:r>
-              <a:rPr sz="2200" b="1">
-                <a:solidFill>
-                  <a:srgbClr val="E10600"/>
-                </a:solidFill>
-                <a:latin typeface="Calibri"/>
-              </a:rPr>
-              <a:t>Today</a:t>
+            <a:off x="777240" y="3474720"/>
+            <a:ext cx="10058400" cy="502920"/>
+          </a:xfrm>
+          <a:prstGeom prst="rect">
+            <a:avLst/>
+          </a:prstGeom>
+          <a:noFill/>
+        </p:spPr>
+        <p:txBody>
+          <a:bodyPr wrap="square">
+            <a:spAutoFit/>
+          </a:bodyPr>
+          <a:lstStyle/>
+          <a:p>
+            <a:pPr algn="l"/>
+            <a:r>
+              <a:rPr sz="2200" b="0">
+                <a:solidFill>
+                  <a:srgbClr val="FFFFFF"/>
+                </a:solidFill>
+                <a:latin typeface="Calibri"/>
+              </a:rPr>
+              <a:t>2    Confirm the problem. Keep the recommended replacement.</a:t>
             </a:r>
           </a:p>
         </p:txBody>
@@ -10119,8 +12437,8 @@
         </p:nvSpPr>
         <p:spPr>
           <a:xfrm>
-            <a:off x="2834640" y="2468880"/>
-            <a:ext cx="8503920" cy="822960"/>
+            <a:off x="777240" y="4114800"/>
+            <a:ext cx="10058400" cy="502920"/>
           </a:xfrm>
           <a:prstGeom prst="rect">
             <a:avLst/>
@@ -10137,11 +12455,11 @@
             <a:r>
               <a:rPr sz="2200" b="0">
                 <a:solidFill>
-                  <a:srgbClr val="1C1B1A"/>
-                </a:solidFill>
-                <a:latin typeface="Calibri"/>
-              </a:rPr>
-              <a:t>A customer can finish a damaged, missed or missing delivery without a call.</a:t>
+                  <a:srgbClr val="FFFFFF"/>
+                </a:solidFill>
+                <a:latin typeface="Calibri"/>
+              </a:rPr>
+              <a:t>3    Check for an update until the case is ready.</a:t>
             </a:r>
           </a:p>
         </p:txBody>
@@ -10154,43 +12472,8 @@
         </p:nvSpPr>
         <p:spPr>
           <a:xfrm>
-            <a:off x="502920" y="3611880"/>
-            <a:ext cx="2194560" cy="640080"/>
-          </a:xfrm>
-          <a:prstGeom prst="rect">
-            <a:avLst/>
-          </a:prstGeom>
-          <a:noFill/>
-        </p:spPr>
-        <p:txBody>
-          <a:bodyPr wrap="square">
-            <a:spAutoFit/>
-          </a:bodyPr>
-          <a:lstStyle/>
-          <a:p>
-            <a:pPr algn="l"/>
-            <a:r>
-              <a:rPr sz="2200" b="1">
-                <a:solidFill>
-                  <a:srgbClr val="E10600"/>
-                </a:solidFill>
-                <a:latin typeface="Calibri"/>
-              </a:rPr>
-              <a:t>Next</a:t>
-            </a:r>
-          </a:p>
-        </p:txBody>
-      </p:sp>
-      <p:sp>
-        <p:nvSpPr>
-          <p:cNvPr id="11" name="TextBox 10"/>
-          <p:cNvSpPr txBox="1"/>
-          <p:nvPr/>
-        </p:nvSpPr>
-        <p:spPr>
-          <a:xfrm>
-            <a:off x="2834640" y="3611880"/>
-            <a:ext cx="8503920" cy="822960"/>
+            <a:off x="777240" y="4754879"/>
+            <a:ext cx="10058400" cy="502920"/>
           </a:xfrm>
           <a:prstGeom prst="rect">
             <a:avLst/>
@@ -10207,81 +12490,11 @@
             <a:r>
               <a:rPr sz="2200" b="0">
                 <a:solidFill>
-                  <a:srgbClr val="1C1B1A"/>
-                </a:solidFill>
-                <a:latin typeface="Calibri"/>
-              </a:rPr>
-              <a:t>The decision-data foundation and routing automation stay on the programme, behind shadow evidence.</a:t>
-            </a:r>
-          </a:p>
-        </p:txBody>
-      </p:sp>
-      <p:sp>
-        <p:nvSpPr>
-          <p:cNvPr id="12" name="TextBox 11"/>
-          <p:cNvSpPr txBox="1"/>
-          <p:nvPr/>
-        </p:nvSpPr>
-        <p:spPr>
-          <a:xfrm>
-            <a:off x="502920" y="4754880"/>
-            <a:ext cx="2194560" cy="640080"/>
-          </a:xfrm>
-          <a:prstGeom prst="rect">
-            <a:avLst/>
-          </a:prstGeom>
-          <a:noFill/>
-        </p:spPr>
-        <p:txBody>
-          <a:bodyPr wrap="square">
-            <a:spAutoFit/>
-          </a:bodyPr>
-          <a:lstStyle/>
-          <a:p>
-            <a:pPr algn="l"/>
-            <a:r>
-              <a:rPr sz="2200" b="1">
-                <a:solidFill>
-                  <a:srgbClr val="E10600"/>
-                </a:solidFill>
-                <a:latin typeface="Calibri"/>
-              </a:rPr>
-              <a:t>Guardrail</a:t>
-            </a:r>
-          </a:p>
-        </p:txBody>
-      </p:sp>
-      <p:sp>
-        <p:nvSpPr>
-          <p:cNvPr id="13" name="TextBox 12"/>
-          <p:cNvSpPr txBox="1"/>
-          <p:nvPr/>
-        </p:nvSpPr>
-        <p:spPr>
-          <a:xfrm>
-            <a:off x="2834640" y="4754880"/>
-            <a:ext cx="8503920" cy="822960"/>
-          </a:xfrm>
-          <a:prstGeom prst="rect">
-            <a:avLst/>
-          </a:prstGeom>
-          <a:noFill/>
-        </p:spPr>
-        <p:txBody>
-          <a:bodyPr wrap="square">
-            <a:spAutoFit/>
-          </a:bodyPr>
-          <a:lstStyle/>
-          <a:p>
-            <a:pPr algn="l"/>
-            <a:r>
-              <a:rPr sz="2200" b="0">
-                <a:solidFill>
-                  <a:srgbClr val="1C1B1A"/>
-                </a:solidFill>
-                <a:latin typeface="Calibri"/>
-              </a:rPr>
-              <a:t>A refund is explicit. A healthy order is not turned into a case.</a:t>
+                  <a:srgbClr val="FFFFFF"/>
+                </a:solidFill>
+                <a:latin typeface="Calibri"/>
+              </a:rPr>
+              <a:t>4    Confirm. Show the SAP service request.</a:t>
             </a:r>
           </a:p>
         </p:txBody>

--- a/INFOSYS704 A3/pitch/Kmart-Delivery-Assist-Lab12.pptx
+++ b/INFOSYS704 A3/pitch/Kmart-Delivery-Assist-Lab12.pptx
@@ -794,7 +794,7 @@
           <a:lstStyle/>
           <a:p>
             <a:r>
-              <a:t>Do not spend speaking time here unless asked. This slide has to be last in the file. Fill the three UPIs before Canvas upload. Confirm the 34/33/33 split with the whole group. If the split changes, change the percentages so they still total 100.</a:t>
+              <a:t>Do not spend speaking time here unless asked. This slide has to be last in the file. UPIs are filled in. Confirm the 34/33/33 split with the whole group. If the split changes, change the percentages so they still total 100.</a:t>
             </a:r>
           </a:p>
         </p:txBody>
@@ -6739,6 +6739,15 @@
                     <a:lstStyle/>
                     <a:p>
                       <a:pPr algn="ctr"/>
+                      <a:r>
+                        <a:rPr sz="1200" b="0">
+                          <a:solidFill>
+                            <a:srgbClr val="1C1B1A"/>
+                          </a:solidFill>
+                          <a:latin typeface="Calibri"/>
+                        </a:rPr>
+                        <a:t>dyua155</a:t>
+                      </a:r>
                     </a:p>
                   </a:txBody>
                   <a:tcPr anchor="ctr">
@@ -6753,6 +6762,15 @@
                     <a:lstStyle/>
                     <a:p>
                       <a:pPr algn="ctr"/>
+                      <a:r>
+                        <a:rPr sz="1200" b="0">
+                          <a:solidFill>
+                            <a:srgbClr val="1C1B1A"/>
+                          </a:solidFill>
+                          <a:latin typeface="Calibri"/>
+                        </a:rPr>
+                        <a:t>tmoh716</a:t>
+                      </a:r>
                     </a:p>
                   </a:txBody>
                   <a:tcPr anchor="ctr">
@@ -6767,6 +6785,15 @@
                     <a:lstStyle/>
                     <a:p>
                       <a:pPr algn="ctr"/>
+                      <a:r>
+                        <a:rPr sz="1200" b="0">
+                          <a:solidFill>
+                            <a:srgbClr val="1C1B1A"/>
+                          </a:solidFill>
+                          <a:latin typeface="Calibri"/>
+                        </a:rPr>
+                        <a:t>hugn456</a:t>
+                      </a:r>
                     </a:p>
                   </a:txBody>
                   <a:tcPr anchor="ctr">
@@ -7059,7 +7086,7 @@
                 <a:latin typeface="Calibri"/>
               </a:rPr>
               <a:t>Criteria explanation:
-1. UPI: Enter each team member’s UPI before upload. The cells above are intentionally blank.
+1. UPI: Enter each team member’s UPI.
 2. % Contribution: Enter a percentage for each member. The figures must add up to 100%.
 3. Comments (optional): Add a comment where the percentage needs context.</a:t>
             </a:r>
